--- a/testcases/anim-build.pptx
+++ b/testcases/anim-build.pptx
@@ -6,6 +6,8 @@
   </p:sldMasterIdLst>
   <p:sldIdLst>
     <p:sldId id="256" r:id="rId2"/>
+    <p:sldId id="257" r:id="rId3"/>
+    <p:sldId id="258" r:id="rId4"/>
   </p:sldIdLst>
   <p:sldSz cx="12192000" cy="6858000"/>
   <p:notesSz cx="6858000" cy="9144000"/>
@@ -107,6 +109,1946 @@
 </p:presentation>
 </file>
 
+<file path=ppt/charts/chart1.xml><?xml version="1.0" encoding="utf-8"?>
+<c:chartSpace xmlns:c="http://schemas.openxmlformats.org/drawingml/2006/chart" xmlns:a="http://schemas.openxmlformats.org/drawingml/2006/main" xmlns:r="http://schemas.openxmlformats.org/officeDocument/2006/relationships" xmlns:c16r2="http://schemas.microsoft.com/office/drawing/2015/06/chart">
+  <c:date1904 val="0"/>
+  <c:lang val="zh-CN"/>
+  <c:roundedCorners val="0"/>
+  <mc:AlternateContent xmlns:mc="http://schemas.openxmlformats.org/markup-compatibility/2006">
+    <mc:Choice xmlns:c14="http://schemas.microsoft.com/office/drawing/2007/8/2/chart" Requires="c14">
+      <c14:style val="102"/>
+    </mc:Choice>
+    <mc:Fallback>
+      <c:style val="2"/>
+    </mc:Fallback>
+  </mc:AlternateContent>
+  <c:chart>
+    <c:autoTitleDeleted val="0"/>
+    <c:plotArea>
+      <c:layout/>
+      <c:barChart>
+        <c:barDir val="col"/>
+        <c:grouping val="clustered"/>
+        <c:varyColors val="0"/>
+        <c:ser>
+          <c:idx val="0"/>
+          <c:order val="0"/>
+          <c:tx>
+            <c:strRef>
+              <c:f>Sheet1!$B$1</c:f>
+              <c:strCache>
+                <c:ptCount val="1"/>
+                <c:pt idx="0">
+                  <c:v>系列 1</c:v>
+                </c:pt>
+              </c:strCache>
+            </c:strRef>
+          </c:tx>
+          <c:spPr>
+            <a:solidFill>
+              <a:schemeClr val="accent1"/>
+            </a:solidFill>
+            <a:ln>
+              <a:noFill/>
+            </a:ln>
+            <a:effectLst/>
+          </c:spPr>
+          <c:invertIfNegative val="0"/>
+          <c:cat>
+            <c:strRef>
+              <c:f>Sheet1!$A$2:$A$5</c:f>
+              <c:strCache>
+                <c:ptCount val="4"/>
+                <c:pt idx="0">
+                  <c:v>类别 1</c:v>
+                </c:pt>
+                <c:pt idx="1">
+                  <c:v>类别 2</c:v>
+                </c:pt>
+                <c:pt idx="2">
+                  <c:v>类别 3</c:v>
+                </c:pt>
+                <c:pt idx="3">
+                  <c:v>类别 4</c:v>
+                </c:pt>
+              </c:strCache>
+            </c:strRef>
+          </c:cat>
+          <c:val>
+            <c:numRef>
+              <c:f>Sheet1!$B$2:$B$5</c:f>
+              <c:numCache>
+                <c:formatCode>General</c:formatCode>
+                <c:ptCount val="4"/>
+                <c:pt idx="0">
+                  <c:v>4.3</c:v>
+                </c:pt>
+                <c:pt idx="1">
+                  <c:v>2.5</c:v>
+                </c:pt>
+                <c:pt idx="2">
+                  <c:v>3.5</c:v>
+                </c:pt>
+                <c:pt idx="3">
+                  <c:v>4.5</c:v>
+                </c:pt>
+              </c:numCache>
+            </c:numRef>
+          </c:val>
+          <c:extLst>
+            <c:ext xmlns:c16="http://schemas.microsoft.com/office/drawing/2014/chart" uri="{C3380CC4-5D6E-409C-BE32-E72D297353CC}">
+              <c16:uniqueId val="{00000000-ACA9-408E-AA0F-B34BDAE904DC}"/>
+            </c:ext>
+          </c:extLst>
+        </c:ser>
+        <c:ser>
+          <c:idx val="1"/>
+          <c:order val="1"/>
+          <c:tx>
+            <c:strRef>
+              <c:f>Sheet1!$C$1</c:f>
+              <c:strCache>
+                <c:ptCount val="1"/>
+                <c:pt idx="0">
+                  <c:v>系列 2</c:v>
+                </c:pt>
+              </c:strCache>
+            </c:strRef>
+          </c:tx>
+          <c:spPr>
+            <a:solidFill>
+              <a:schemeClr val="accent2"/>
+            </a:solidFill>
+            <a:ln>
+              <a:noFill/>
+            </a:ln>
+            <a:effectLst/>
+          </c:spPr>
+          <c:invertIfNegative val="0"/>
+          <c:cat>
+            <c:strRef>
+              <c:f>Sheet1!$A$2:$A$5</c:f>
+              <c:strCache>
+                <c:ptCount val="4"/>
+                <c:pt idx="0">
+                  <c:v>类别 1</c:v>
+                </c:pt>
+                <c:pt idx="1">
+                  <c:v>类别 2</c:v>
+                </c:pt>
+                <c:pt idx="2">
+                  <c:v>类别 3</c:v>
+                </c:pt>
+                <c:pt idx="3">
+                  <c:v>类别 4</c:v>
+                </c:pt>
+              </c:strCache>
+            </c:strRef>
+          </c:cat>
+          <c:val>
+            <c:numRef>
+              <c:f>Sheet1!$C$2:$C$5</c:f>
+              <c:numCache>
+                <c:formatCode>General</c:formatCode>
+                <c:ptCount val="4"/>
+                <c:pt idx="0">
+                  <c:v>2.4</c:v>
+                </c:pt>
+                <c:pt idx="1">
+                  <c:v>4.4000000000000004</c:v>
+                </c:pt>
+                <c:pt idx="2">
+                  <c:v>1.8</c:v>
+                </c:pt>
+                <c:pt idx="3">
+                  <c:v>2.8</c:v>
+                </c:pt>
+              </c:numCache>
+            </c:numRef>
+          </c:val>
+          <c:extLst>
+            <c:ext xmlns:c16="http://schemas.microsoft.com/office/drawing/2014/chart" uri="{C3380CC4-5D6E-409C-BE32-E72D297353CC}">
+              <c16:uniqueId val="{00000001-ACA9-408E-AA0F-B34BDAE904DC}"/>
+            </c:ext>
+          </c:extLst>
+        </c:ser>
+        <c:ser>
+          <c:idx val="2"/>
+          <c:order val="2"/>
+          <c:tx>
+            <c:strRef>
+              <c:f>Sheet1!$D$1</c:f>
+              <c:strCache>
+                <c:ptCount val="1"/>
+                <c:pt idx="0">
+                  <c:v>系列 3</c:v>
+                </c:pt>
+              </c:strCache>
+            </c:strRef>
+          </c:tx>
+          <c:spPr>
+            <a:solidFill>
+              <a:schemeClr val="accent3"/>
+            </a:solidFill>
+            <a:ln>
+              <a:noFill/>
+            </a:ln>
+            <a:effectLst/>
+          </c:spPr>
+          <c:invertIfNegative val="0"/>
+          <c:cat>
+            <c:strRef>
+              <c:f>Sheet1!$A$2:$A$5</c:f>
+              <c:strCache>
+                <c:ptCount val="4"/>
+                <c:pt idx="0">
+                  <c:v>类别 1</c:v>
+                </c:pt>
+                <c:pt idx="1">
+                  <c:v>类别 2</c:v>
+                </c:pt>
+                <c:pt idx="2">
+                  <c:v>类别 3</c:v>
+                </c:pt>
+                <c:pt idx="3">
+                  <c:v>类别 4</c:v>
+                </c:pt>
+              </c:strCache>
+            </c:strRef>
+          </c:cat>
+          <c:val>
+            <c:numRef>
+              <c:f>Sheet1!$D$2:$D$5</c:f>
+              <c:numCache>
+                <c:formatCode>General</c:formatCode>
+                <c:ptCount val="4"/>
+                <c:pt idx="0">
+                  <c:v>2</c:v>
+                </c:pt>
+                <c:pt idx="1">
+                  <c:v>2</c:v>
+                </c:pt>
+                <c:pt idx="2">
+                  <c:v>3</c:v>
+                </c:pt>
+                <c:pt idx="3">
+                  <c:v>5</c:v>
+                </c:pt>
+              </c:numCache>
+            </c:numRef>
+          </c:val>
+          <c:extLst>
+            <c:ext xmlns:c16="http://schemas.microsoft.com/office/drawing/2014/chart" uri="{C3380CC4-5D6E-409C-BE32-E72D297353CC}">
+              <c16:uniqueId val="{00000002-ACA9-408E-AA0F-B34BDAE904DC}"/>
+            </c:ext>
+          </c:extLst>
+        </c:ser>
+        <c:dLbls>
+          <c:showLegendKey val="0"/>
+          <c:showVal val="0"/>
+          <c:showCatName val="0"/>
+          <c:showSerName val="0"/>
+          <c:showPercent val="0"/>
+          <c:showBubbleSize val="0"/>
+        </c:dLbls>
+        <c:gapWidth val="219"/>
+        <c:overlap val="-27"/>
+        <c:axId val="968794943"/>
+        <c:axId val="968797343"/>
+      </c:barChart>
+      <c:catAx>
+        <c:axId val="968794943"/>
+        <c:scaling>
+          <c:orientation val="minMax"/>
+        </c:scaling>
+        <c:delete val="0"/>
+        <c:axPos val="b"/>
+        <c:numFmt formatCode="General" sourceLinked="1"/>
+        <c:majorTickMark val="none"/>
+        <c:minorTickMark val="none"/>
+        <c:tickLblPos val="nextTo"/>
+        <c:spPr>
+          <a:noFill/>
+          <a:ln w="9525" cap="flat" cmpd="sng" algn="ctr">
+            <a:solidFill>
+              <a:schemeClr val="tx1">
+                <a:lumMod val="15000"/>
+                <a:lumOff val="85000"/>
+              </a:schemeClr>
+            </a:solidFill>
+            <a:round/>
+          </a:ln>
+          <a:effectLst/>
+        </c:spPr>
+        <c:txPr>
+          <a:bodyPr rot="-60000000" spcFirstLastPara="1" vertOverflow="ellipsis" vert="horz" wrap="square" anchor="ctr" anchorCtr="1"/>
+          <a:lstStyle/>
+          <a:p>
+            <a:pPr>
+              <a:defRPr sz="1197" b="0" i="0" u="none" strike="noStrike" kern="1200" baseline="0">
+                <a:solidFill>
+                  <a:schemeClr val="tx1">
+                    <a:lumMod val="65000"/>
+                    <a:lumOff val="35000"/>
+                  </a:schemeClr>
+                </a:solidFill>
+                <a:latin typeface="+mn-lt"/>
+                <a:ea typeface="+mn-ea"/>
+                <a:cs typeface="+mn-cs"/>
+              </a:defRPr>
+            </a:pPr>
+            <a:endParaRPr lang="zh-CN"/>
+          </a:p>
+        </c:txPr>
+        <c:crossAx val="968797343"/>
+        <c:crosses val="autoZero"/>
+        <c:auto val="1"/>
+        <c:lblAlgn val="ctr"/>
+        <c:lblOffset val="100"/>
+        <c:noMultiLvlLbl val="0"/>
+      </c:catAx>
+      <c:valAx>
+        <c:axId val="968797343"/>
+        <c:scaling>
+          <c:orientation val="minMax"/>
+        </c:scaling>
+        <c:delete val="0"/>
+        <c:axPos val="l"/>
+        <c:majorGridlines>
+          <c:spPr>
+            <a:ln w="9525" cap="flat" cmpd="sng" algn="ctr">
+              <a:solidFill>
+                <a:schemeClr val="tx1">
+                  <a:lumMod val="15000"/>
+                  <a:lumOff val="85000"/>
+                </a:schemeClr>
+              </a:solidFill>
+              <a:round/>
+            </a:ln>
+            <a:effectLst/>
+          </c:spPr>
+        </c:majorGridlines>
+        <c:numFmt formatCode="General" sourceLinked="1"/>
+        <c:majorTickMark val="none"/>
+        <c:minorTickMark val="none"/>
+        <c:tickLblPos val="nextTo"/>
+        <c:spPr>
+          <a:noFill/>
+          <a:ln>
+            <a:noFill/>
+          </a:ln>
+          <a:effectLst/>
+        </c:spPr>
+        <c:txPr>
+          <a:bodyPr rot="-60000000" spcFirstLastPara="1" vertOverflow="ellipsis" vert="horz" wrap="square" anchor="ctr" anchorCtr="1"/>
+          <a:lstStyle/>
+          <a:p>
+            <a:pPr>
+              <a:defRPr sz="1197" b="0" i="0" u="none" strike="noStrike" kern="1200" baseline="0">
+                <a:solidFill>
+                  <a:schemeClr val="tx1">
+                    <a:lumMod val="65000"/>
+                    <a:lumOff val="35000"/>
+                  </a:schemeClr>
+                </a:solidFill>
+                <a:latin typeface="+mn-lt"/>
+                <a:ea typeface="+mn-ea"/>
+                <a:cs typeface="+mn-cs"/>
+              </a:defRPr>
+            </a:pPr>
+            <a:endParaRPr lang="zh-CN"/>
+          </a:p>
+        </c:txPr>
+        <c:crossAx val="968794943"/>
+        <c:crosses val="autoZero"/>
+        <c:crossBetween val="between"/>
+      </c:valAx>
+      <c:spPr>
+        <a:noFill/>
+        <a:ln>
+          <a:noFill/>
+        </a:ln>
+        <a:effectLst/>
+      </c:spPr>
+    </c:plotArea>
+    <c:legend>
+      <c:legendPos val="b"/>
+      <c:overlay val="0"/>
+      <c:spPr>
+        <a:noFill/>
+        <a:ln>
+          <a:noFill/>
+        </a:ln>
+        <a:effectLst/>
+      </c:spPr>
+      <c:txPr>
+        <a:bodyPr rot="0" spcFirstLastPara="1" vertOverflow="ellipsis" vert="horz" wrap="square" anchor="ctr" anchorCtr="1"/>
+        <a:lstStyle/>
+        <a:p>
+          <a:pPr>
+            <a:defRPr sz="1197" b="0" i="0" u="none" strike="noStrike" kern="1200" baseline="0">
+              <a:solidFill>
+                <a:schemeClr val="tx1">
+                  <a:lumMod val="65000"/>
+                  <a:lumOff val="35000"/>
+                </a:schemeClr>
+              </a:solidFill>
+              <a:latin typeface="+mn-lt"/>
+              <a:ea typeface="+mn-ea"/>
+              <a:cs typeface="+mn-cs"/>
+            </a:defRPr>
+          </a:pPr>
+          <a:endParaRPr lang="zh-CN"/>
+        </a:p>
+      </c:txPr>
+    </c:legend>
+    <c:plotVisOnly val="1"/>
+    <c:dispBlanksAs val="gap"/>
+    <c:extLst>
+      <c:ext xmlns:c16r3="http://schemas.microsoft.com/office/drawing/2017/03/chart" uri="{56B9EC1D-385E-4148-901F-78D8002777C0}">
+        <c16r3:dataDisplayOptions16>
+          <c16r3:dispNaAsBlank val="1"/>
+        </c16r3:dataDisplayOptions16>
+      </c:ext>
+    </c:extLst>
+    <c:showDLblsOverMax val="0"/>
+  </c:chart>
+  <c:spPr>
+    <a:noFill/>
+    <a:ln>
+      <a:noFill/>
+    </a:ln>
+    <a:effectLst/>
+  </c:spPr>
+  <c:txPr>
+    <a:bodyPr/>
+    <a:lstStyle/>
+    <a:p>
+      <a:pPr>
+        <a:defRPr/>
+      </a:pPr>
+      <a:endParaRPr lang="zh-CN"/>
+    </a:p>
+  </c:txPr>
+  <c:externalData r:id="rId3">
+    <c:autoUpdate val="0"/>
+  </c:externalData>
+</c:chartSpace>
+</file>
+
+<file path=ppt/charts/chart2.xml><?xml version="1.0" encoding="utf-8"?>
+<c:chartSpace xmlns:c="http://schemas.openxmlformats.org/drawingml/2006/chart" xmlns:a="http://schemas.openxmlformats.org/drawingml/2006/main" xmlns:r="http://schemas.openxmlformats.org/officeDocument/2006/relationships" xmlns:c16r2="http://schemas.microsoft.com/office/drawing/2015/06/chart">
+  <c:date1904 val="0"/>
+  <c:lang val="zh-CN"/>
+  <c:roundedCorners val="0"/>
+  <mc:AlternateContent xmlns:mc="http://schemas.openxmlformats.org/markup-compatibility/2006">
+    <mc:Choice xmlns:c14="http://schemas.microsoft.com/office/drawing/2007/8/2/chart" Requires="c14">
+      <c14:style val="102"/>
+    </mc:Choice>
+    <mc:Fallback>
+      <c:style val="2"/>
+    </mc:Fallback>
+  </mc:AlternateContent>
+  <c:chart>
+    <c:autoTitleDeleted val="0"/>
+    <c:plotArea>
+      <c:layout/>
+      <c:barChart>
+        <c:barDir val="col"/>
+        <c:grouping val="clustered"/>
+        <c:varyColors val="0"/>
+        <c:ser>
+          <c:idx val="0"/>
+          <c:order val="0"/>
+          <c:tx>
+            <c:strRef>
+              <c:f>Sheet1!$B$1</c:f>
+              <c:strCache>
+                <c:ptCount val="1"/>
+                <c:pt idx="0">
+                  <c:v>系列 1</c:v>
+                </c:pt>
+              </c:strCache>
+            </c:strRef>
+          </c:tx>
+          <c:spPr>
+            <a:solidFill>
+              <a:schemeClr val="accent1"/>
+            </a:solidFill>
+            <a:ln>
+              <a:noFill/>
+            </a:ln>
+            <a:effectLst/>
+          </c:spPr>
+          <c:invertIfNegative val="0"/>
+          <c:cat>
+            <c:strRef>
+              <c:f>Sheet1!$A$2:$A$5</c:f>
+              <c:strCache>
+                <c:ptCount val="4"/>
+                <c:pt idx="0">
+                  <c:v>类别 1</c:v>
+                </c:pt>
+                <c:pt idx="1">
+                  <c:v>类别 2</c:v>
+                </c:pt>
+                <c:pt idx="2">
+                  <c:v>类别 3</c:v>
+                </c:pt>
+                <c:pt idx="3">
+                  <c:v>类别 4</c:v>
+                </c:pt>
+              </c:strCache>
+            </c:strRef>
+          </c:cat>
+          <c:val>
+            <c:numRef>
+              <c:f>Sheet1!$B$2:$B$5</c:f>
+              <c:numCache>
+                <c:formatCode>General</c:formatCode>
+                <c:ptCount val="4"/>
+                <c:pt idx="0">
+                  <c:v>4.3</c:v>
+                </c:pt>
+                <c:pt idx="1">
+                  <c:v>2.5</c:v>
+                </c:pt>
+                <c:pt idx="2">
+                  <c:v>3.5</c:v>
+                </c:pt>
+                <c:pt idx="3">
+                  <c:v>4.5</c:v>
+                </c:pt>
+              </c:numCache>
+            </c:numRef>
+          </c:val>
+          <c:extLst>
+            <c:ext xmlns:c16="http://schemas.microsoft.com/office/drawing/2014/chart" uri="{C3380CC4-5D6E-409C-BE32-E72D297353CC}">
+              <c16:uniqueId val="{00000000-BD5D-4859-9EAA-EB440A3F5840}"/>
+            </c:ext>
+          </c:extLst>
+        </c:ser>
+        <c:ser>
+          <c:idx val="1"/>
+          <c:order val="1"/>
+          <c:tx>
+            <c:strRef>
+              <c:f>Sheet1!$C$1</c:f>
+              <c:strCache>
+                <c:ptCount val="1"/>
+                <c:pt idx="0">
+                  <c:v>系列 2</c:v>
+                </c:pt>
+              </c:strCache>
+            </c:strRef>
+          </c:tx>
+          <c:spPr>
+            <a:solidFill>
+              <a:schemeClr val="accent2"/>
+            </a:solidFill>
+            <a:ln>
+              <a:noFill/>
+            </a:ln>
+            <a:effectLst/>
+          </c:spPr>
+          <c:invertIfNegative val="0"/>
+          <c:cat>
+            <c:strRef>
+              <c:f>Sheet1!$A$2:$A$5</c:f>
+              <c:strCache>
+                <c:ptCount val="4"/>
+                <c:pt idx="0">
+                  <c:v>类别 1</c:v>
+                </c:pt>
+                <c:pt idx="1">
+                  <c:v>类别 2</c:v>
+                </c:pt>
+                <c:pt idx="2">
+                  <c:v>类别 3</c:v>
+                </c:pt>
+                <c:pt idx="3">
+                  <c:v>类别 4</c:v>
+                </c:pt>
+              </c:strCache>
+            </c:strRef>
+          </c:cat>
+          <c:val>
+            <c:numRef>
+              <c:f>Sheet1!$C$2:$C$5</c:f>
+              <c:numCache>
+                <c:formatCode>General</c:formatCode>
+                <c:ptCount val="4"/>
+                <c:pt idx="0">
+                  <c:v>2.4</c:v>
+                </c:pt>
+                <c:pt idx="1">
+                  <c:v>4.4000000000000004</c:v>
+                </c:pt>
+                <c:pt idx="2">
+                  <c:v>1.8</c:v>
+                </c:pt>
+                <c:pt idx="3">
+                  <c:v>2.8</c:v>
+                </c:pt>
+              </c:numCache>
+            </c:numRef>
+          </c:val>
+          <c:extLst>
+            <c:ext xmlns:c16="http://schemas.microsoft.com/office/drawing/2014/chart" uri="{C3380CC4-5D6E-409C-BE32-E72D297353CC}">
+              <c16:uniqueId val="{00000001-BD5D-4859-9EAA-EB440A3F5840}"/>
+            </c:ext>
+          </c:extLst>
+        </c:ser>
+        <c:ser>
+          <c:idx val="2"/>
+          <c:order val="2"/>
+          <c:tx>
+            <c:strRef>
+              <c:f>Sheet1!$D$1</c:f>
+              <c:strCache>
+                <c:ptCount val="1"/>
+                <c:pt idx="0">
+                  <c:v>系列 3</c:v>
+                </c:pt>
+              </c:strCache>
+            </c:strRef>
+          </c:tx>
+          <c:spPr>
+            <a:solidFill>
+              <a:schemeClr val="accent3"/>
+            </a:solidFill>
+            <a:ln>
+              <a:noFill/>
+            </a:ln>
+            <a:effectLst/>
+          </c:spPr>
+          <c:invertIfNegative val="0"/>
+          <c:cat>
+            <c:strRef>
+              <c:f>Sheet1!$A$2:$A$5</c:f>
+              <c:strCache>
+                <c:ptCount val="4"/>
+                <c:pt idx="0">
+                  <c:v>类别 1</c:v>
+                </c:pt>
+                <c:pt idx="1">
+                  <c:v>类别 2</c:v>
+                </c:pt>
+                <c:pt idx="2">
+                  <c:v>类别 3</c:v>
+                </c:pt>
+                <c:pt idx="3">
+                  <c:v>类别 4</c:v>
+                </c:pt>
+              </c:strCache>
+            </c:strRef>
+          </c:cat>
+          <c:val>
+            <c:numRef>
+              <c:f>Sheet1!$D$2:$D$5</c:f>
+              <c:numCache>
+                <c:formatCode>General</c:formatCode>
+                <c:ptCount val="4"/>
+                <c:pt idx="0">
+                  <c:v>2</c:v>
+                </c:pt>
+                <c:pt idx="1">
+                  <c:v>2</c:v>
+                </c:pt>
+                <c:pt idx="2">
+                  <c:v>3</c:v>
+                </c:pt>
+                <c:pt idx="3">
+                  <c:v>5</c:v>
+                </c:pt>
+              </c:numCache>
+            </c:numRef>
+          </c:val>
+          <c:extLst>
+            <c:ext xmlns:c16="http://schemas.microsoft.com/office/drawing/2014/chart" uri="{C3380CC4-5D6E-409C-BE32-E72D297353CC}">
+              <c16:uniqueId val="{00000002-BD5D-4859-9EAA-EB440A3F5840}"/>
+            </c:ext>
+          </c:extLst>
+        </c:ser>
+        <c:dLbls>
+          <c:showLegendKey val="0"/>
+          <c:showVal val="0"/>
+          <c:showCatName val="0"/>
+          <c:showSerName val="0"/>
+          <c:showPercent val="0"/>
+          <c:showBubbleSize val="0"/>
+        </c:dLbls>
+        <c:gapWidth val="219"/>
+        <c:overlap val="-27"/>
+        <c:axId val="970484783"/>
+        <c:axId val="970488143"/>
+      </c:barChart>
+      <c:catAx>
+        <c:axId val="970484783"/>
+        <c:scaling>
+          <c:orientation val="minMax"/>
+        </c:scaling>
+        <c:delete val="0"/>
+        <c:axPos val="b"/>
+        <c:numFmt formatCode="General" sourceLinked="1"/>
+        <c:majorTickMark val="none"/>
+        <c:minorTickMark val="none"/>
+        <c:tickLblPos val="nextTo"/>
+        <c:spPr>
+          <a:noFill/>
+          <a:ln w="9525" cap="flat" cmpd="sng" algn="ctr">
+            <a:solidFill>
+              <a:schemeClr val="tx1">
+                <a:lumMod val="15000"/>
+                <a:lumOff val="85000"/>
+              </a:schemeClr>
+            </a:solidFill>
+            <a:round/>
+          </a:ln>
+          <a:effectLst/>
+        </c:spPr>
+        <c:txPr>
+          <a:bodyPr rot="-60000000" spcFirstLastPara="1" vertOverflow="ellipsis" vert="horz" wrap="square" anchor="ctr" anchorCtr="1"/>
+          <a:lstStyle/>
+          <a:p>
+            <a:pPr>
+              <a:defRPr sz="1197" b="0" i="0" u="none" strike="noStrike" kern="1200" baseline="0">
+                <a:solidFill>
+                  <a:schemeClr val="tx1">
+                    <a:lumMod val="65000"/>
+                    <a:lumOff val="35000"/>
+                  </a:schemeClr>
+                </a:solidFill>
+                <a:latin typeface="+mn-lt"/>
+                <a:ea typeface="+mn-ea"/>
+                <a:cs typeface="+mn-cs"/>
+              </a:defRPr>
+            </a:pPr>
+            <a:endParaRPr lang="zh-CN"/>
+          </a:p>
+        </c:txPr>
+        <c:crossAx val="970488143"/>
+        <c:crosses val="autoZero"/>
+        <c:auto val="1"/>
+        <c:lblAlgn val="ctr"/>
+        <c:lblOffset val="100"/>
+        <c:noMultiLvlLbl val="0"/>
+      </c:catAx>
+      <c:valAx>
+        <c:axId val="970488143"/>
+        <c:scaling>
+          <c:orientation val="minMax"/>
+        </c:scaling>
+        <c:delete val="0"/>
+        <c:axPos val="l"/>
+        <c:majorGridlines>
+          <c:spPr>
+            <a:ln w="9525" cap="flat" cmpd="sng" algn="ctr">
+              <a:solidFill>
+                <a:schemeClr val="tx1">
+                  <a:lumMod val="15000"/>
+                  <a:lumOff val="85000"/>
+                </a:schemeClr>
+              </a:solidFill>
+              <a:round/>
+            </a:ln>
+            <a:effectLst/>
+          </c:spPr>
+        </c:majorGridlines>
+        <c:numFmt formatCode="General" sourceLinked="1"/>
+        <c:majorTickMark val="none"/>
+        <c:minorTickMark val="none"/>
+        <c:tickLblPos val="nextTo"/>
+        <c:spPr>
+          <a:noFill/>
+          <a:ln>
+            <a:noFill/>
+          </a:ln>
+          <a:effectLst/>
+        </c:spPr>
+        <c:txPr>
+          <a:bodyPr rot="-60000000" spcFirstLastPara="1" vertOverflow="ellipsis" vert="horz" wrap="square" anchor="ctr" anchorCtr="1"/>
+          <a:lstStyle/>
+          <a:p>
+            <a:pPr>
+              <a:defRPr sz="1197" b="0" i="0" u="none" strike="noStrike" kern="1200" baseline="0">
+                <a:solidFill>
+                  <a:schemeClr val="tx1">
+                    <a:lumMod val="65000"/>
+                    <a:lumOff val="35000"/>
+                  </a:schemeClr>
+                </a:solidFill>
+                <a:latin typeface="+mn-lt"/>
+                <a:ea typeface="+mn-ea"/>
+                <a:cs typeface="+mn-cs"/>
+              </a:defRPr>
+            </a:pPr>
+            <a:endParaRPr lang="zh-CN"/>
+          </a:p>
+        </c:txPr>
+        <c:crossAx val="970484783"/>
+        <c:crosses val="autoZero"/>
+        <c:crossBetween val="between"/>
+      </c:valAx>
+      <c:spPr>
+        <a:noFill/>
+        <a:ln>
+          <a:noFill/>
+        </a:ln>
+        <a:effectLst/>
+      </c:spPr>
+    </c:plotArea>
+    <c:legend>
+      <c:legendPos val="b"/>
+      <c:overlay val="0"/>
+      <c:spPr>
+        <a:noFill/>
+        <a:ln>
+          <a:noFill/>
+        </a:ln>
+        <a:effectLst/>
+      </c:spPr>
+      <c:txPr>
+        <a:bodyPr rot="0" spcFirstLastPara="1" vertOverflow="ellipsis" vert="horz" wrap="square" anchor="ctr" anchorCtr="1"/>
+        <a:lstStyle/>
+        <a:p>
+          <a:pPr>
+            <a:defRPr sz="1197" b="0" i="0" u="none" strike="noStrike" kern="1200" baseline="0">
+              <a:solidFill>
+                <a:schemeClr val="tx1">
+                  <a:lumMod val="65000"/>
+                  <a:lumOff val="35000"/>
+                </a:schemeClr>
+              </a:solidFill>
+              <a:latin typeface="+mn-lt"/>
+              <a:ea typeface="+mn-ea"/>
+              <a:cs typeface="+mn-cs"/>
+            </a:defRPr>
+          </a:pPr>
+          <a:endParaRPr lang="zh-CN"/>
+        </a:p>
+      </c:txPr>
+    </c:legend>
+    <c:plotVisOnly val="1"/>
+    <c:dispBlanksAs val="gap"/>
+    <c:extLst>
+      <c:ext xmlns:c16r3="http://schemas.microsoft.com/office/drawing/2017/03/chart" uri="{56B9EC1D-385E-4148-901F-78D8002777C0}">
+        <c16r3:dataDisplayOptions16>
+          <c16r3:dispNaAsBlank val="1"/>
+        </c16r3:dataDisplayOptions16>
+      </c:ext>
+    </c:extLst>
+    <c:showDLblsOverMax val="0"/>
+  </c:chart>
+  <c:spPr>
+    <a:noFill/>
+    <a:ln>
+      <a:noFill/>
+    </a:ln>
+    <a:effectLst/>
+  </c:spPr>
+  <c:txPr>
+    <a:bodyPr/>
+    <a:lstStyle/>
+    <a:p>
+      <a:pPr>
+        <a:defRPr/>
+      </a:pPr>
+      <a:endParaRPr lang="zh-CN"/>
+    </a:p>
+  </c:txPr>
+  <c:externalData r:id="rId3">
+    <c:autoUpdate val="0"/>
+  </c:externalData>
+</c:chartSpace>
+</file>
+
+<file path=ppt/charts/colors1.xml><?xml version="1.0" encoding="utf-8"?>
+<cs:colorStyle xmlns:cs="http://schemas.microsoft.com/office/drawing/2012/chartStyle" xmlns:a="http://schemas.openxmlformats.org/drawingml/2006/main" meth="cycle" id="10">
+  <a:schemeClr val="accent1"/>
+  <a:schemeClr val="accent2"/>
+  <a:schemeClr val="accent3"/>
+  <a:schemeClr val="accent4"/>
+  <a:schemeClr val="accent5"/>
+  <a:schemeClr val="accent6"/>
+  <cs:variation/>
+  <cs:variation>
+    <a:lumMod val="60000"/>
+  </cs:variation>
+  <cs:variation>
+    <a:lumMod val="80000"/>
+    <a:lumOff val="20000"/>
+  </cs:variation>
+  <cs:variation>
+    <a:lumMod val="80000"/>
+  </cs:variation>
+  <cs:variation>
+    <a:lumMod val="60000"/>
+    <a:lumOff val="40000"/>
+  </cs:variation>
+  <cs:variation>
+    <a:lumMod val="50000"/>
+  </cs:variation>
+  <cs:variation>
+    <a:lumMod val="70000"/>
+    <a:lumOff val="30000"/>
+  </cs:variation>
+  <cs:variation>
+    <a:lumMod val="70000"/>
+  </cs:variation>
+  <cs:variation>
+    <a:lumMod val="50000"/>
+    <a:lumOff val="50000"/>
+  </cs:variation>
+</cs:colorStyle>
+</file>
+
+<file path=ppt/charts/colors2.xml><?xml version="1.0" encoding="utf-8"?>
+<cs:colorStyle xmlns:cs="http://schemas.microsoft.com/office/drawing/2012/chartStyle" xmlns:a="http://schemas.openxmlformats.org/drawingml/2006/main" meth="cycle" id="10">
+  <a:schemeClr val="accent1"/>
+  <a:schemeClr val="accent2"/>
+  <a:schemeClr val="accent3"/>
+  <a:schemeClr val="accent4"/>
+  <a:schemeClr val="accent5"/>
+  <a:schemeClr val="accent6"/>
+  <cs:variation/>
+  <cs:variation>
+    <a:lumMod val="60000"/>
+  </cs:variation>
+  <cs:variation>
+    <a:lumMod val="80000"/>
+    <a:lumOff val="20000"/>
+  </cs:variation>
+  <cs:variation>
+    <a:lumMod val="80000"/>
+  </cs:variation>
+  <cs:variation>
+    <a:lumMod val="60000"/>
+    <a:lumOff val="40000"/>
+  </cs:variation>
+  <cs:variation>
+    <a:lumMod val="50000"/>
+  </cs:variation>
+  <cs:variation>
+    <a:lumMod val="70000"/>
+    <a:lumOff val="30000"/>
+  </cs:variation>
+  <cs:variation>
+    <a:lumMod val="70000"/>
+  </cs:variation>
+  <cs:variation>
+    <a:lumMod val="50000"/>
+    <a:lumOff val="50000"/>
+  </cs:variation>
+</cs:colorStyle>
+</file>
+
+<file path=ppt/charts/style1.xml><?xml version="1.0" encoding="utf-8"?>
+<cs:chartStyle xmlns:cs="http://schemas.microsoft.com/office/drawing/2012/chartStyle" xmlns:a="http://schemas.openxmlformats.org/drawingml/2006/main" id="201">
+  <cs:axisTitle>
+    <cs:lnRef idx="0"/>
+    <cs:fillRef idx="0"/>
+    <cs:effectRef idx="0"/>
+    <cs:fontRef idx="minor">
+      <a:schemeClr val="tx1">
+        <a:lumMod val="65000"/>
+        <a:lumOff val="35000"/>
+      </a:schemeClr>
+    </cs:fontRef>
+    <cs:defRPr sz="1330" kern="1200"/>
+  </cs:axisTitle>
+  <cs:categoryAxis>
+    <cs:lnRef idx="0"/>
+    <cs:fillRef idx="0"/>
+    <cs:effectRef idx="0"/>
+    <cs:fontRef idx="minor">
+      <a:schemeClr val="tx1">
+        <a:lumMod val="65000"/>
+        <a:lumOff val="35000"/>
+      </a:schemeClr>
+    </cs:fontRef>
+    <cs:spPr>
+      <a:ln w="9525" cap="flat" cmpd="sng" algn="ctr">
+        <a:solidFill>
+          <a:schemeClr val="tx1">
+            <a:lumMod val="15000"/>
+            <a:lumOff val="85000"/>
+          </a:schemeClr>
+        </a:solidFill>
+        <a:round/>
+      </a:ln>
+    </cs:spPr>
+    <cs:defRPr sz="1197" kern="1200"/>
+  </cs:categoryAxis>
+  <cs:chartArea mods="allowNoFillOverride allowNoLineOverride">
+    <cs:lnRef idx="0"/>
+    <cs:fillRef idx="0"/>
+    <cs:effectRef idx="0"/>
+    <cs:fontRef idx="minor">
+      <a:schemeClr val="tx1"/>
+    </cs:fontRef>
+    <cs:spPr>
+      <a:solidFill>
+        <a:schemeClr val="bg1"/>
+      </a:solidFill>
+      <a:ln w="9525" cap="flat" cmpd="sng" algn="ctr">
+        <a:solidFill>
+          <a:schemeClr val="tx1">
+            <a:lumMod val="15000"/>
+            <a:lumOff val="85000"/>
+          </a:schemeClr>
+        </a:solidFill>
+        <a:round/>
+      </a:ln>
+    </cs:spPr>
+    <cs:defRPr sz="1330" kern="1200"/>
+  </cs:chartArea>
+  <cs:dataLabel>
+    <cs:lnRef idx="0"/>
+    <cs:fillRef idx="0"/>
+    <cs:effectRef idx="0"/>
+    <cs:fontRef idx="minor">
+      <a:schemeClr val="tx1">
+        <a:lumMod val="75000"/>
+        <a:lumOff val="25000"/>
+      </a:schemeClr>
+    </cs:fontRef>
+    <cs:defRPr sz="1197" kern="1200"/>
+  </cs:dataLabel>
+  <cs:dataLabelCallout>
+    <cs:lnRef idx="0"/>
+    <cs:fillRef idx="0"/>
+    <cs:effectRef idx="0"/>
+    <cs:fontRef idx="minor">
+      <a:schemeClr val="dk1">
+        <a:lumMod val="65000"/>
+        <a:lumOff val="35000"/>
+      </a:schemeClr>
+    </cs:fontRef>
+    <cs:spPr>
+      <a:solidFill>
+        <a:schemeClr val="lt1"/>
+      </a:solidFill>
+      <a:ln>
+        <a:solidFill>
+          <a:schemeClr val="dk1">
+            <a:lumMod val="25000"/>
+            <a:lumOff val="75000"/>
+          </a:schemeClr>
+        </a:solidFill>
+      </a:ln>
+    </cs:spPr>
+    <cs:defRPr sz="1197" kern="1200"/>
+    <cs:bodyPr rot="0" spcFirstLastPara="1" vertOverflow="clip" horzOverflow="clip" vert="horz" wrap="square" lIns="36576" tIns="18288" rIns="36576" bIns="18288" anchor="ctr" anchorCtr="1">
+      <a:spAutoFit/>
+    </cs:bodyPr>
+  </cs:dataLabelCallout>
+  <cs:dataPoint>
+    <cs:lnRef idx="0"/>
+    <cs:fillRef idx="1">
+      <cs:styleClr val="auto"/>
+    </cs:fillRef>
+    <cs:effectRef idx="0"/>
+    <cs:fontRef idx="minor">
+      <a:schemeClr val="tx1"/>
+    </cs:fontRef>
+  </cs:dataPoint>
+  <cs:dataPoint3D>
+    <cs:lnRef idx="0"/>
+    <cs:fillRef idx="1">
+      <cs:styleClr val="auto"/>
+    </cs:fillRef>
+    <cs:effectRef idx="0"/>
+    <cs:fontRef idx="minor">
+      <a:schemeClr val="tx1"/>
+    </cs:fontRef>
+  </cs:dataPoint3D>
+  <cs:dataPointLine>
+    <cs:lnRef idx="0">
+      <cs:styleClr val="auto"/>
+    </cs:lnRef>
+    <cs:fillRef idx="1"/>
+    <cs:effectRef idx="0"/>
+    <cs:fontRef idx="minor">
+      <a:schemeClr val="tx1"/>
+    </cs:fontRef>
+    <cs:spPr>
+      <a:ln w="28575" cap="rnd">
+        <a:solidFill>
+          <a:schemeClr val="phClr"/>
+        </a:solidFill>
+        <a:round/>
+      </a:ln>
+    </cs:spPr>
+  </cs:dataPointLine>
+  <cs:dataPointMarker>
+    <cs:lnRef idx="0">
+      <cs:styleClr val="auto"/>
+    </cs:lnRef>
+    <cs:fillRef idx="1">
+      <cs:styleClr val="auto"/>
+    </cs:fillRef>
+    <cs:effectRef idx="0"/>
+    <cs:fontRef idx="minor">
+      <a:schemeClr val="tx1"/>
+    </cs:fontRef>
+    <cs:spPr>
+      <a:ln w="9525">
+        <a:solidFill>
+          <a:schemeClr val="phClr"/>
+        </a:solidFill>
+      </a:ln>
+    </cs:spPr>
+  </cs:dataPointMarker>
+  <cs:dataPointMarkerLayout symbol="circle" size="5"/>
+  <cs:dataPointWireframe>
+    <cs:lnRef idx="0">
+      <cs:styleClr val="auto"/>
+    </cs:lnRef>
+    <cs:fillRef idx="1"/>
+    <cs:effectRef idx="0"/>
+    <cs:fontRef idx="minor">
+      <a:schemeClr val="tx1"/>
+    </cs:fontRef>
+    <cs:spPr>
+      <a:ln w="9525" cap="rnd">
+        <a:solidFill>
+          <a:schemeClr val="phClr"/>
+        </a:solidFill>
+        <a:round/>
+      </a:ln>
+    </cs:spPr>
+  </cs:dataPointWireframe>
+  <cs:dataTable>
+    <cs:lnRef idx="0"/>
+    <cs:fillRef idx="0"/>
+    <cs:effectRef idx="0"/>
+    <cs:fontRef idx="minor">
+      <a:schemeClr val="tx1">
+        <a:lumMod val="65000"/>
+        <a:lumOff val="35000"/>
+      </a:schemeClr>
+    </cs:fontRef>
+    <cs:spPr>
+      <a:noFill/>
+      <a:ln w="9525" cap="flat" cmpd="sng" algn="ctr">
+        <a:solidFill>
+          <a:schemeClr val="tx1">
+            <a:lumMod val="15000"/>
+            <a:lumOff val="85000"/>
+          </a:schemeClr>
+        </a:solidFill>
+        <a:round/>
+      </a:ln>
+    </cs:spPr>
+    <cs:defRPr sz="1197" kern="1200"/>
+  </cs:dataTable>
+  <cs:downBar>
+    <cs:lnRef idx="0"/>
+    <cs:fillRef idx="0"/>
+    <cs:effectRef idx="0"/>
+    <cs:fontRef idx="minor">
+      <a:schemeClr val="dk1"/>
+    </cs:fontRef>
+    <cs:spPr>
+      <a:solidFill>
+        <a:schemeClr val="dk1">
+          <a:lumMod val="65000"/>
+          <a:lumOff val="35000"/>
+        </a:schemeClr>
+      </a:solidFill>
+      <a:ln w="9525">
+        <a:solidFill>
+          <a:schemeClr val="tx1">
+            <a:lumMod val="65000"/>
+            <a:lumOff val="35000"/>
+          </a:schemeClr>
+        </a:solidFill>
+      </a:ln>
+    </cs:spPr>
+  </cs:downBar>
+  <cs:dropLine>
+    <cs:lnRef idx="0"/>
+    <cs:fillRef idx="0"/>
+    <cs:effectRef idx="0"/>
+    <cs:fontRef idx="minor">
+      <a:schemeClr val="tx1"/>
+    </cs:fontRef>
+    <cs:spPr>
+      <a:ln w="9525" cap="flat" cmpd="sng" algn="ctr">
+        <a:solidFill>
+          <a:schemeClr val="tx1">
+            <a:lumMod val="35000"/>
+            <a:lumOff val="65000"/>
+          </a:schemeClr>
+        </a:solidFill>
+        <a:round/>
+      </a:ln>
+    </cs:spPr>
+  </cs:dropLine>
+  <cs:errorBar>
+    <cs:lnRef idx="0"/>
+    <cs:fillRef idx="0"/>
+    <cs:effectRef idx="0"/>
+    <cs:fontRef idx="minor">
+      <a:schemeClr val="tx1"/>
+    </cs:fontRef>
+    <cs:spPr>
+      <a:ln w="9525" cap="flat" cmpd="sng" algn="ctr">
+        <a:solidFill>
+          <a:schemeClr val="tx1">
+            <a:lumMod val="65000"/>
+            <a:lumOff val="35000"/>
+          </a:schemeClr>
+        </a:solidFill>
+        <a:round/>
+      </a:ln>
+    </cs:spPr>
+  </cs:errorBar>
+  <cs:floor>
+    <cs:lnRef idx="0"/>
+    <cs:fillRef idx="0"/>
+    <cs:effectRef idx="0"/>
+    <cs:fontRef idx="minor">
+      <a:schemeClr val="tx1"/>
+    </cs:fontRef>
+    <cs:spPr>
+      <a:noFill/>
+      <a:ln>
+        <a:noFill/>
+      </a:ln>
+    </cs:spPr>
+  </cs:floor>
+  <cs:gridlineMajor>
+    <cs:lnRef idx="0"/>
+    <cs:fillRef idx="0"/>
+    <cs:effectRef idx="0"/>
+    <cs:fontRef idx="minor">
+      <a:schemeClr val="tx1"/>
+    </cs:fontRef>
+    <cs:spPr>
+      <a:ln w="9525" cap="flat" cmpd="sng" algn="ctr">
+        <a:solidFill>
+          <a:schemeClr val="tx1">
+            <a:lumMod val="15000"/>
+            <a:lumOff val="85000"/>
+          </a:schemeClr>
+        </a:solidFill>
+        <a:round/>
+      </a:ln>
+    </cs:spPr>
+  </cs:gridlineMajor>
+  <cs:gridlineMinor>
+    <cs:lnRef idx="0"/>
+    <cs:fillRef idx="0"/>
+    <cs:effectRef idx="0"/>
+    <cs:fontRef idx="minor">
+      <a:schemeClr val="tx1"/>
+    </cs:fontRef>
+    <cs:spPr>
+      <a:ln w="9525" cap="flat" cmpd="sng" algn="ctr">
+        <a:solidFill>
+          <a:schemeClr val="tx1">
+            <a:lumMod val="5000"/>
+            <a:lumOff val="95000"/>
+          </a:schemeClr>
+        </a:solidFill>
+        <a:round/>
+      </a:ln>
+    </cs:spPr>
+  </cs:gridlineMinor>
+  <cs:hiLoLine>
+    <cs:lnRef idx="0"/>
+    <cs:fillRef idx="0"/>
+    <cs:effectRef idx="0"/>
+    <cs:fontRef idx="minor">
+      <a:schemeClr val="tx1"/>
+    </cs:fontRef>
+    <cs:spPr>
+      <a:ln w="9525" cap="flat" cmpd="sng" algn="ctr">
+        <a:solidFill>
+          <a:schemeClr val="tx1">
+            <a:lumMod val="75000"/>
+            <a:lumOff val="25000"/>
+          </a:schemeClr>
+        </a:solidFill>
+        <a:round/>
+      </a:ln>
+    </cs:spPr>
+  </cs:hiLoLine>
+  <cs:leaderLine>
+    <cs:lnRef idx="0"/>
+    <cs:fillRef idx="0"/>
+    <cs:effectRef idx="0"/>
+    <cs:fontRef idx="minor">
+      <a:schemeClr val="tx1"/>
+    </cs:fontRef>
+    <cs:spPr>
+      <a:ln w="9525" cap="flat" cmpd="sng" algn="ctr">
+        <a:solidFill>
+          <a:schemeClr val="tx1">
+            <a:lumMod val="35000"/>
+            <a:lumOff val="65000"/>
+          </a:schemeClr>
+        </a:solidFill>
+        <a:round/>
+      </a:ln>
+    </cs:spPr>
+  </cs:leaderLine>
+  <cs:legend>
+    <cs:lnRef idx="0"/>
+    <cs:fillRef idx="0"/>
+    <cs:effectRef idx="0"/>
+    <cs:fontRef idx="minor">
+      <a:schemeClr val="tx1">
+        <a:lumMod val="65000"/>
+        <a:lumOff val="35000"/>
+      </a:schemeClr>
+    </cs:fontRef>
+    <cs:defRPr sz="1197" kern="1200"/>
+  </cs:legend>
+  <cs:plotArea mods="allowNoFillOverride allowNoLineOverride">
+    <cs:lnRef idx="0"/>
+    <cs:fillRef idx="0"/>
+    <cs:effectRef idx="0"/>
+    <cs:fontRef idx="minor">
+      <a:schemeClr val="tx1"/>
+    </cs:fontRef>
+  </cs:plotArea>
+  <cs:plotArea3D mods="allowNoFillOverride allowNoLineOverride">
+    <cs:lnRef idx="0"/>
+    <cs:fillRef idx="0"/>
+    <cs:effectRef idx="0"/>
+    <cs:fontRef idx="minor">
+      <a:schemeClr val="tx1"/>
+    </cs:fontRef>
+  </cs:plotArea3D>
+  <cs:seriesAxis>
+    <cs:lnRef idx="0"/>
+    <cs:fillRef idx="0"/>
+    <cs:effectRef idx="0"/>
+    <cs:fontRef idx="minor">
+      <a:schemeClr val="tx1">
+        <a:lumMod val="65000"/>
+        <a:lumOff val="35000"/>
+      </a:schemeClr>
+    </cs:fontRef>
+    <cs:defRPr sz="1197" kern="1200"/>
+  </cs:seriesAxis>
+  <cs:seriesLine>
+    <cs:lnRef idx="0"/>
+    <cs:fillRef idx="0"/>
+    <cs:effectRef idx="0"/>
+    <cs:fontRef idx="minor">
+      <a:schemeClr val="tx1"/>
+    </cs:fontRef>
+    <cs:spPr>
+      <a:ln w="9525" cap="flat" cmpd="sng" algn="ctr">
+        <a:solidFill>
+          <a:schemeClr val="tx1">
+            <a:lumMod val="35000"/>
+            <a:lumOff val="65000"/>
+          </a:schemeClr>
+        </a:solidFill>
+        <a:round/>
+      </a:ln>
+    </cs:spPr>
+  </cs:seriesLine>
+  <cs:title>
+    <cs:lnRef idx="0"/>
+    <cs:fillRef idx="0"/>
+    <cs:effectRef idx="0"/>
+    <cs:fontRef idx="minor">
+      <a:schemeClr val="tx1">
+        <a:lumMod val="65000"/>
+        <a:lumOff val="35000"/>
+      </a:schemeClr>
+    </cs:fontRef>
+    <cs:defRPr sz="1862" b="0" kern="1200" spc="0" baseline="0"/>
+  </cs:title>
+  <cs:trendline>
+    <cs:lnRef idx="0">
+      <cs:styleClr val="auto"/>
+    </cs:lnRef>
+    <cs:fillRef idx="0"/>
+    <cs:effectRef idx="0"/>
+    <cs:fontRef idx="minor">
+      <a:schemeClr val="tx1"/>
+    </cs:fontRef>
+    <cs:spPr>
+      <a:ln w="19050" cap="rnd">
+        <a:solidFill>
+          <a:schemeClr val="phClr"/>
+        </a:solidFill>
+        <a:prstDash val="sysDot"/>
+      </a:ln>
+    </cs:spPr>
+  </cs:trendline>
+  <cs:trendlineLabel>
+    <cs:lnRef idx="0"/>
+    <cs:fillRef idx="0"/>
+    <cs:effectRef idx="0"/>
+    <cs:fontRef idx="minor">
+      <a:schemeClr val="tx1">
+        <a:lumMod val="65000"/>
+        <a:lumOff val="35000"/>
+      </a:schemeClr>
+    </cs:fontRef>
+    <cs:defRPr sz="1197" kern="1200"/>
+  </cs:trendlineLabel>
+  <cs:upBar>
+    <cs:lnRef idx="0"/>
+    <cs:fillRef idx="0"/>
+    <cs:effectRef idx="0"/>
+    <cs:fontRef idx="minor">
+      <a:schemeClr val="dk1"/>
+    </cs:fontRef>
+    <cs:spPr>
+      <a:solidFill>
+        <a:schemeClr val="lt1"/>
+      </a:solidFill>
+      <a:ln w="9525">
+        <a:solidFill>
+          <a:schemeClr val="tx1">
+            <a:lumMod val="15000"/>
+            <a:lumOff val="85000"/>
+          </a:schemeClr>
+        </a:solidFill>
+      </a:ln>
+    </cs:spPr>
+  </cs:upBar>
+  <cs:valueAxis>
+    <cs:lnRef idx="0"/>
+    <cs:fillRef idx="0"/>
+    <cs:effectRef idx="0"/>
+    <cs:fontRef idx="minor">
+      <a:schemeClr val="tx1">
+        <a:lumMod val="65000"/>
+        <a:lumOff val="35000"/>
+      </a:schemeClr>
+    </cs:fontRef>
+    <cs:defRPr sz="1197" kern="1200"/>
+  </cs:valueAxis>
+  <cs:wall>
+    <cs:lnRef idx="0"/>
+    <cs:fillRef idx="0"/>
+    <cs:effectRef idx="0"/>
+    <cs:fontRef idx="minor">
+      <a:schemeClr val="tx1"/>
+    </cs:fontRef>
+    <cs:spPr>
+      <a:noFill/>
+      <a:ln>
+        <a:noFill/>
+      </a:ln>
+    </cs:spPr>
+  </cs:wall>
+</cs:chartStyle>
+</file>
+
+<file path=ppt/charts/style2.xml><?xml version="1.0" encoding="utf-8"?>
+<cs:chartStyle xmlns:cs="http://schemas.microsoft.com/office/drawing/2012/chartStyle" xmlns:a="http://schemas.openxmlformats.org/drawingml/2006/main" id="201">
+  <cs:axisTitle>
+    <cs:lnRef idx="0"/>
+    <cs:fillRef idx="0"/>
+    <cs:effectRef idx="0"/>
+    <cs:fontRef idx="minor">
+      <a:schemeClr val="tx1">
+        <a:lumMod val="65000"/>
+        <a:lumOff val="35000"/>
+      </a:schemeClr>
+    </cs:fontRef>
+    <cs:defRPr sz="1330" kern="1200"/>
+  </cs:axisTitle>
+  <cs:categoryAxis>
+    <cs:lnRef idx="0"/>
+    <cs:fillRef idx="0"/>
+    <cs:effectRef idx="0"/>
+    <cs:fontRef idx="minor">
+      <a:schemeClr val="tx1">
+        <a:lumMod val="65000"/>
+        <a:lumOff val="35000"/>
+      </a:schemeClr>
+    </cs:fontRef>
+    <cs:spPr>
+      <a:ln w="9525" cap="flat" cmpd="sng" algn="ctr">
+        <a:solidFill>
+          <a:schemeClr val="tx1">
+            <a:lumMod val="15000"/>
+            <a:lumOff val="85000"/>
+          </a:schemeClr>
+        </a:solidFill>
+        <a:round/>
+      </a:ln>
+    </cs:spPr>
+    <cs:defRPr sz="1197" kern="1200"/>
+  </cs:categoryAxis>
+  <cs:chartArea mods="allowNoFillOverride allowNoLineOverride">
+    <cs:lnRef idx="0"/>
+    <cs:fillRef idx="0"/>
+    <cs:effectRef idx="0"/>
+    <cs:fontRef idx="minor">
+      <a:schemeClr val="tx1"/>
+    </cs:fontRef>
+    <cs:spPr>
+      <a:solidFill>
+        <a:schemeClr val="bg1"/>
+      </a:solidFill>
+      <a:ln w="9525" cap="flat" cmpd="sng" algn="ctr">
+        <a:solidFill>
+          <a:schemeClr val="tx1">
+            <a:lumMod val="15000"/>
+            <a:lumOff val="85000"/>
+          </a:schemeClr>
+        </a:solidFill>
+        <a:round/>
+      </a:ln>
+    </cs:spPr>
+    <cs:defRPr sz="1330" kern="1200"/>
+  </cs:chartArea>
+  <cs:dataLabel>
+    <cs:lnRef idx="0"/>
+    <cs:fillRef idx="0"/>
+    <cs:effectRef idx="0"/>
+    <cs:fontRef idx="minor">
+      <a:schemeClr val="tx1">
+        <a:lumMod val="75000"/>
+        <a:lumOff val="25000"/>
+      </a:schemeClr>
+    </cs:fontRef>
+    <cs:defRPr sz="1197" kern="1200"/>
+  </cs:dataLabel>
+  <cs:dataLabelCallout>
+    <cs:lnRef idx="0"/>
+    <cs:fillRef idx="0"/>
+    <cs:effectRef idx="0"/>
+    <cs:fontRef idx="minor">
+      <a:schemeClr val="dk1">
+        <a:lumMod val="65000"/>
+        <a:lumOff val="35000"/>
+      </a:schemeClr>
+    </cs:fontRef>
+    <cs:spPr>
+      <a:solidFill>
+        <a:schemeClr val="lt1"/>
+      </a:solidFill>
+      <a:ln>
+        <a:solidFill>
+          <a:schemeClr val="dk1">
+            <a:lumMod val="25000"/>
+            <a:lumOff val="75000"/>
+          </a:schemeClr>
+        </a:solidFill>
+      </a:ln>
+    </cs:spPr>
+    <cs:defRPr sz="1197" kern="1200"/>
+    <cs:bodyPr rot="0" spcFirstLastPara="1" vertOverflow="clip" horzOverflow="clip" vert="horz" wrap="square" lIns="36576" tIns="18288" rIns="36576" bIns="18288" anchor="ctr" anchorCtr="1">
+      <a:spAutoFit/>
+    </cs:bodyPr>
+  </cs:dataLabelCallout>
+  <cs:dataPoint>
+    <cs:lnRef idx="0"/>
+    <cs:fillRef idx="1">
+      <cs:styleClr val="auto"/>
+    </cs:fillRef>
+    <cs:effectRef idx="0"/>
+    <cs:fontRef idx="minor">
+      <a:schemeClr val="tx1"/>
+    </cs:fontRef>
+  </cs:dataPoint>
+  <cs:dataPoint3D>
+    <cs:lnRef idx="0"/>
+    <cs:fillRef idx="1">
+      <cs:styleClr val="auto"/>
+    </cs:fillRef>
+    <cs:effectRef idx="0"/>
+    <cs:fontRef idx="minor">
+      <a:schemeClr val="tx1"/>
+    </cs:fontRef>
+  </cs:dataPoint3D>
+  <cs:dataPointLine>
+    <cs:lnRef idx="0">
+      <cs:styleClr val="auto"/>
+    </cs:lnRef>
+    <cs:fillRef idx="1"/>
+    <cs:effectRef idx="0"/>
+    <cs:fontRef idx="minor">
+      <a:schemeClr val="tx1"/>
+    </cs:fontRef>
+    <cs:spPr>
+      <a:ln w="28575" cap="rnd">
+        <a:solidFill>
+          <a:schemeClr val="phClr"/>
+        </a:solidFill>
+        <a:round/>
+      </a:ln>
+    </cs:spPr>
+  </cs:dataPointLine>
+  <cs:dataPointMarker>
+    <cs:lnRef idx="0">
+      <cs:styleClr val="auto"/>
+    </cs:lnRef>
+    <cs:fillRef idx="1">
+      <cs:styleClr val="auto"/>
+    </cs:fillRef>
+    <cs:effectRef idx="0"/>
+    <cs:fontRef idx="minor">
+      <a:schemeClr val="tx1"/>
+    </cs:fontRef>
+    <cs:spPr>
+      <a:ln w="9525">
+        <a:solidFill>
+          <a:schemeClr val="phClr"/>
+        </a:solidFill>
+      </a:ln>
+    </cs:spPr>
+  </cs:dataPointMarker>
+  <cs:dataPointMarkerLayout symbol="circle" size="5"/>
+  <cs:dataPointWireframe>
+    <cs:lnRef idx="0">
+      <cs:styleClr val="auto"/>
+    </cs:lnRef>
+    <cs:fillRef idx="1"/>
+    <cs:effectRef idx="0"/>
+    <cs:fontRef idx="minor">
+      <a:schemeClr val="tx1"/>
+    </cs:fontRef>
+    <cs:spPr>
+      <a:ln w="9525" cap="rnd">
+        <a:solidFill>
+          <a:schemeClr val="phClr"/>
+        </a:solidFill>
+        <a:round/>
+      </a:ln>
+    </cs:spPr>
+  </cs:dataPointWireframe>
+  <cs:dataTable>
+    <cs:lnRef idx="0"/>
+    <cs:fillRef idx="0"/>
+    <cs:effectRef idx="0"/>
+    <cs:fontRef idx="minor">
+      <a:schemeClr val="tx1">
+        <a:lumMod val="65000"/>
+        <a:lumOff val="35000"/>
+      </a:schemeClr>
+    </cs:fontRef>
+    <cs:spPr>
+      <a:noFill/>
+      <a:ln w="9525" cap="flat" cmpd="sng" algn="ctr">
+        <a:solidFill>
+          <a:schemeClr val="tx1">
+            <a:lumMod val="15000"/>
+            <a:lumOff val="85000"/>
+          </a:schemeClr>
+        </a:solidFill>
+        <a:round/>
+      </a:ln>
+    </cs:spPr>
+    <cs:defRPr sz="1197" kern="1200"/>
+  </cs:dataTable>
+  <cs:downBar>
+    <cs:lnRef idx="0"/>
+    <cs:fillRef idx="0"/>
+    <cs:effectRef idx="0"/>
+    <cs:fontRef idx="minor">
+      <a:schemeClr val="dk1"/>
+    </cs:fontRef>
+    <cs:spPr>
+      <a:solidFill>
+        <a:schemeClr val="dk1">
+          <a:lumMod val="65000"/>
+          <a:lumOff val="35000"/>
+        </a:schemeClr>
+      </a:solidFill>
+      <a:ln w="9525">
+        <a:solidFill>
+          <a:schemeClr val="tx1">
+            <a:lumMod val="65000"/>
+            <a:lumOff val="35000"/>
+          </a:schemeClr>
+        </a:solidFill>
+      </a:ln>
+    </cs:spPr>
+  </cs:downBar>
+  <cs:dropLine>
+    <cs:lnRef idx="0"/>
+    <cs:fillRef idx="0"/>
+    <cs:effectRef idx="0"/>
+    <cs:fontRef idx="minor">
+      <a:schemeClr val="tx1"/>
+    </cs:fontRef>
+    <cs:spPr>
+      <a:ln w="9525" cap="flat" cmpd="sng" algn="ctr">
+        <a:solidFill>
+          <a:schemeClr val="tx1">
+            <a:lumMod val="35000"/>
+            <a:lumOff val="65000"/>
+          </a:schemeClr>
+        </a:solidFill>
+        <a:round/>
+      </a:ln>
+    </cs:spPr>
+  </cs:dropLine>
+  <cs:errorBar>
+    <cs:lnRef idx="0"/>
+    <cs:fillRef idx="0"/>
+    <cs:effectRef idx="0"/>
+    <cs:fontRef idx="minor">
+      <a:schemeClr val="tx1"/>
+    </cs:fontRef>
+    <cs:spPr>
+      <a:ln w="9525" cap="flat" cmpd="sng" algn="ctr">
+        <a:solidFill>
+          <a:schemeClr val="tx1">
+            <a:lumMod val="65000"/>
+            <a:lumOff val="35000"/>
+          </a:schemeClr>
+        </a:solidFill>
+        <a:round/>
+      </a:ln>
+    </cs:spPr>
+  </cs:errorBar>
+  <cs:floor>
+    <cs:lnRef idx="0"/>
+    <cs:fillRef idx="0"/>
+    <cs:effectRef idx="0"/>
+    <cs:fontRef idx="minor">
+      <a:schemeClr val="tx1"/>
+    </cs:fontRef>
+    <cs:spPr>
+      <a:noFill/>
+      <a:ln>
+        <a:noFill/>
+      </a:ln>
+    </cs:spPr>
+  </cs:floor>
+  <cs:gridlineMajor>
+    <cs:lnRef idx="0"/>
+    <cs:fillRef idx="0"/>
+    <cs:effectRef idx="0"/>
+    <cs:fontRef idx="minor">
+      <a:schemeClr val="tx1"/>
+    </cs:fontRef>
+    <cs:spPr>
+      <a:ln w="9525" cap="flat" cmpd="sng" algn="ctr">
+        <a:solidFill>
+          <a:schemeClr val="tx1">
+            <a:lumMod val="15000"/>
+            <a:lumOff val="85000"/>
+          </a:schemeClr>
+        </a:solidFill>
+        <a:round/>
+      </a:ln>
+    </cs:spPr>
+  </cs:gridlineMajor>
+  <cs:gridlineMinor>
+    <cs:lnRef idx="0"/>
+    <cs:fillRef idx="0"/>
+    <cs:effectRef idx="0"/>
+    <cs:fontRef idx="minor">
+      <a:schemeClr val="tx1"/>
+    </cs:fontRef>
+    <cs:spPr>
+      <a:ln w="9525" cap="flat" cmpd="sng" algn="ctr">
+        <a:solidFill>
+          <a:schemeClr val="tx1">
+            <a:lumMod val="5000"/>
+            <a:lumOff val="95000"/>
+          </a:schemeClr>
+        </a:solidFill>
+        <a:round/>
+      </a:ln>
+    </cs:spPr>
+  </cs:gridlineMinor>
+  <cs:hiLoLine>
+    <cs:lnRef idx="0"/>
+    <cs:fillRef idx="0"/>
+    <cs:effectRef idx="0"/>
+    <cs:fontRef idx="minor">
+      <a:schemeClr val="tx1"/>
+    </cs:fontRef>
+    <cs:spPr>
+      <a:ln w="9525" cap="flat" cmpd="sng" algn="ctr">
+        <a:solidFill>
+          <a:schemeClr val="tx1">
+            <a:lumMod val="75000"/>
+            <a:lumOff val="25000"/>
+          </a:schemeClr>
+        </a:solidFill>
+        <a:round/>
+      </a:ln>
+    </cs:spPr>
+  </cs:hiLoLine>
+  <cs:leaderLine>
+    <cs:lnRef idx="0"/>
+    <cs:fillRef idx="0"/>
+    <cs:effectRef idx="0"/>
+    <cs:fontRef idx="minor">
+      <a:schemeClr val="tx1"/>
+    </cs:fontRef>
+    <cs:spPr>
+      <a:ln w="9525" cap="flat" cmpd="sng" algn="ctr">
+        <a:solidFill>
+          <a:schemeClr val="tx1">
+            <a:lumMod val="35000"/>
+            <a:lumOff val="65000"/>
+          </a:schemeClr>
+        </a:solidFill>
+        <a:round/>
+      </a:ln>
+    </cs:spPr>
+  </cs:leaderLine>
+  <cs:legend>
+    <cs:lnRef idx="0"/>
+    <cs:fillRef idx="0"/>
+    <cs:effectRef idx="0"/>
+    <cs:fontRef idx="minor">
+      <a:schemeClr val="tx1">
+        <a:lumMod val="65000"/>
+        <a:lumOff val="35000"/>
+      </a:schemeClr>
+    </cs:fontRef>
+    <cs:defRPr sz="1197" kern="1200"/>
+  </cs:legend>
+  <cs:plotArea mods="allowNoFillOverride allowNoLineOverride">
+    <cs:lnRef idx="0"/>
+    <cs:fillRef idx="0"/>
+    <cs:effectRef idx="0"/>
+    <cs:fontRef idx="minor">
+      <a:schemeClr val="tx1"/>
+    </cs:fontRef>
+  </cs:plotArea>
+  <cs:plotArea3D mods="allowNoFillOverride allowNoLineOverride">
+    <cs:lnRef idx="0"/>
+    <cs:fillRef idx="0"/>
+    <cs:effectRef idx="0"/>
+    <cs:fontRef idx="minor">
+      <a:schemeClr val="tx1"/>
+    </cs:fontRef>
+  </cs:plotArea3D>
+  <cs:seriesAxis>
+    <cs:lnRef idx="0"/>
+    <cs:fillRef idx="0"/>
+    <cs:effectRef idx="0"/>
+    <cs:fontRef idx="minor">
+      <a:schemeClr val="tx1">
+        <a:lumMod val="65000"/>
+        <a:lumOff val="35000"/>
+      </a:schemeClr>
+    </cs:fontRef>
+    <cs:defRPr sz="1197" kern="1200"/>
+  </cs:seriesAxis>
+  <cs:seriesLine>
+    <cs:lnRef idx="0"/>
+    <cs:fillRef idx="0"/>
+    <cs:effectRef idx="0"/>
+    <cs:fontRef idx="minor">
+      <a:schemeClr val="tx1"/>
+    </cs:fontRef>
+    <cs:spPr>
+      <a:ln w="9525" cap="flat" cmpd="sng" algn="ctr">
+        <a:solidFill>
+          <a:schemeClr val="tx1">
+            <a:lumMod val="35000"/>
+            <a:lumOff val="65000"/>
+          </a:schemeClr>
+        </a:solidFill>
+        <a:round/>
+      </a:ln>
+    </cs:spPr>
+  </cs:seriesLine>
+  <cs:title>
+    <cs:lnRef idx="0"/>
+    <cs:fillRef idx="0"/>
+    <cs:effectRef idx="0"/>
+    <cs:fontRef idx="minor">
+      <a:schemeClr val="tx1">
+        <a:lumMod val="65000"/>
+        <a:lumOff val="35000"/>
+      </a:schemeClr>
+    </cs:fontRef>
+    <cs:defRPr sz="1862" b="0" kern="1200" spc="0" baseline="0"/>
+  </cs:title>
+  <cs:trendline>
+    <cs:lnRef idx="0">
+      <cs:styleClr val="auto"/>
+    </cs:lnRef>
+    <cs:fillRef idx="0"/>
+    <cs:effectRef idx="0"/>
+    <cs:fontRef idx="minor">
+      <a:schemeClr val="tx1"/>
+    </cs:fontRef>
+    <cs:spPr>
+      <a:ln w="19050" cap="rnd">
+        <a:solidFill>
+          <a:schemeClr val="phClr"/>
+        </a:solidFill>
+        <a:prstDash val="sysDot"/>
+      </a:ln>
+    </cs:spPr>
+  </cs:trendline>
+  <cs:trendlineLabel>
+    <cs:lnRef idx="0"/>
+    <cs:fillRef idx="0"/>
+    <cs:effectRef idx="0"/>
+    <cs:fontRef idx="minor">
+      <a:schemeClr val="tx1">
+        <a:lumMod val="65000"/>
+        <a:lumOff val="35000"/>
+      </a:schemeClr>
+    </cs:fontRef>
+    <cs:defRPr sz="1197" kern="1200"/>
+  </cs:trendlineLabel>
+  <cs:upBar>
+    <cs:lnRef idx="0"/>
+    <cs:fillRef idx="0"/>
+    <cs:effectRef idx="0"/>
+    <cs:fontRef idx="minor">
+      <a:schemeClr val="dk1"/>
+    </cs:fontRef>
+    <cs:spPr>
+      <a:solidFill>
+        <a:schemeClr val="lt1"/>
+      </a:solidFill>
+      <a:ln w="9525">
+        <a:solidFill>
+          <a:schemeClr val="tx1">
+            <a:lumMod val="15000"/>
+            <a:lumOff val="85000"/>
+          </a:schemeClr>
+        </a:solidFill>
+      </a:ln>
+    </cs:spPr>
+  </cs:upBar>
+  <cs:valueAxis>
+    <cs:lnRef idx="0"/>
+    <cs:fillRef idx="0"/>
+    <cs:effectRef idx="0"/>
+    <cs:fontRef idx="minor">
+      <a:schemeClr val="tx1">
+        <a:lumMod val="65000"/>
+        <a:lumOff val="35000"/>
+      </a:schemeClr>
+    </cs:fontRef>
+    <cs:defRPr sz="1197" kern="1200"/>
+  </cs:valueAxis>
+  <cs:wall>
+    <cs:lnRef idx="0"/>
+    <cs:fillRef idx="0"/>
+    <cs:effectRef idx="0"/>
+    <cs:fontRef idx="minor">
+      <a:schemeClr val="tx1"/>
+    </cs:fontRef>
+    <cs:spPr>
+      <a:noFill/>
+      <a:ln>
+        <a:noFill/>
+      </a:ln>
+    </cs:spPr>
+  </cs:wall>
+</cs:chartStyle>
+</file>
+
 <file path=ppt/diagrams/colors1.xml><?xml version="1.0" encoding="utf-8"?>
 <dgm:colorsDef xmlns:dgm="http://schemas.openxmlformats.org/drawingml/2006/diagram" xmlns:a="http://schemas.openxmlformats.org/drawingml/2006/main" uniqueId="urn:microsoft.com/office/officeart/2005/8/colors/accent1_2">
   <dgm:title val=""/>
@@ -857,7 +2799,7 @@
 <file path=ppt/diagrams/data1.xml><?xml version="1.0" encoding="utf-8"?>
 <dgm:dataModel xmlns:dgm="http://schemas.openxmlformats.org/drawingml/2006/diagram" xmlns:a="http://schemas.openxmlformats.org/drawingml/2006/main">
   <dgm:ptLst>
-    <dgm:pt modelId="{3674C917-9D07-45F0-991C-45AD4C2FF7C6}" type="doc">
+    <dgm:pt modelId="{7D81F685-4E6B-401D-B0DF-8DD090C41A36}" type="doc">
       <dgm:prSet loTypeId="urn:microsoft.com/office/officeart/2005/8/layout/default" loCatId="list" qsTypeId="urn:microsoft.com/office/officeart/2005/8/quickstyle/simple1" qsCatId="simple" csTypeId="urn:microsoft.com/office/officeart/2005/8/colors/accent1_2" csCatId="accent1" phldr="1"/>
       <dgm:spPr/>
       <dgm:t>
@@ -868,7 +2810,7 @@
         </a:p>
       </dgm:t>
     </dgm:pt>
-    <dgm:pt modelId="{84F1FC79-315D-4B85-91B0-15AF9862199D}">
+    <dgm:pt modelId="{87D0C682-218B-459A-84A9-6E5C1460E3EB}">
       <dgm:prSet phldrT="[文本]"/>
       <dgm:spPr/>
       <dgm:t>
@@ -887,7 +2829,7 @@
         </a:p>
       </dgm:t>
     </dgm:pt>
-    <dgm:pt modelId="{7552C116-45E2-440D-9F86-F64BE8153837}" type="parTrans" cxnId="{EFACBA9B-549C-424E-9983-24D408A3E888}">
+    <dgm:pt modelId="{8147F584-7698-452F-96B3-90E922EB3772}" type="parTrans" cxnId="{94B188A0-C82D-4918-A377-398E575C83DB}">
       <dgm:prSet/>
       <dgm:spPr/>
       <dgm:t>
@@ -898,7 +2840,7 @@
         </a:p>
       </dgm:t>
     </dgm:pt>
-    <dgm:pt modelId="{DA372E09-9D8B-4204-9675-232D73B8720A}" type="sibTrans" cxnId="{EFACBA9B-549C-424E-9983-24D408A3E888}">
+    <dgm:pt modelId="{083B6E12-240E-42D8-914B-ADC0908A17AB}" type="sibTrans" cxnId="{94B188A0-C82D-4918-A377-398E575C83DB}">
       <dgm:prSet/>
       <dgm:spPr/>
       <dgm:t>
@@ -909,7 +2851,7 @@
         </a:p>
       </dgm:t>
     </dgm:pt>
-    <dgm:pt modelId="{5A76E1FA-9E76-4123-8314-326EFD1680D9}">
+    <dgm:pt modelId="{9D4D23BC-4240-4F15-977F-6103A7A10FB2}">
       <dgm:prSet phldrT="[文本]"/>
       <dgm:spPr/>
       <dgm:t>
@@ -928,7 +2870,7 @@
         </a:p>
       </dgm:t>
     </dgm:pt>
-    <dgm:pt modelId="{3D3E7756-FC52-4076-805C-33CA417ACACB}" type="parTrans" cxnId="{1EBA4F04-C246-4F58-A24A-1C8E7F0CA755}">
+    <dgm:pt modelId="{D7DF6BC9-1207-45E4-89AF-48A68E967E71}" type="parTrans" cxnId="{0A56B8EC-4D86-4DBE-934C-F144691711B9}">
       <dgm:prSet/>
       <dgm:spPr/>
       <dgm:t>
@@ -939,7 +2881,7 @@
         </a:p>
       </dgm:t>
     </dgm:pt>
-    <dgm:pt modelId="{18E18A1B-A1E1-46F1-BD03-B0964F04A5DB}" type="sibTrans" cxnId="{1EBA4F04-C246-4F58-A24A-1C8E7F0CA755}">
+    <dgm:pt modelId="{B568A5CE-CA8A-48D5-9B2E-434651496262}" type="sibTrans" cxnId="{0A56B8EC-4D86-4DBE-934C-F144691711B9}">
       <dgm:prSet/>
       <dgm:spPr/>
       <dgm:t>
@@ -950,7 +2892,7 @@
         </a:p>
       </dgm:t>
     </dgm:pt>
-    <dgm:pt modelId="{08841FA0-E2D8-4E61-9565-93CC5E312AE9}">
+    <dgm:pt modelId="{AFD7CD7F-46E4-4954-B8AE-50ABB6D6822A}">
       <dgm:prSet phldrT="[文本]"/>
       <dgm:spPr/>
       <dgm:t>
@@ -969,7 +2911,7 @@
         </a:p>
       </dgm:t>
     </dgm:pt>
-    <dgm:pt modelId="{BAE0B844-49C3-40DE-B5FE-246FCEADF118}" type="parTrans" cxnId="{DB9C30EB-8821-40BF-B199-736FFFBA689F}">
+    <dgm:pt modelId="{D9A8E820-9AF4-4DAE-8793-BAC1341E0ADC}" type="parTrans" cxnId="{0C3E33B1-5FA8-4DF8-BA99-7D357BA5A098}">
       <dgm:prSet/>
       <dgm:spPr/>
       <dgm:t>
@@ -980,7 +2922,7 @@
         </a:p>
       </dgm:t>
     </dgm:pt>
-    <dgm:pt modelId="{A1E3295C-19FF-48EB-8BEC-ADFFD12BA8C2}" type="sibTrans" cxnId="{DB9C30EB-8821-40BF-B199-736FFFBA689F}">
+    <dgm:pt modelId="{879ADB0D-F85E-42A5-9D7A-6DA25E31C4DC}" type="sibTrans" cxnId="{0C3E33B1-5FA8-4DF8-BA99-7D357BA5A098}">
       <dgm:prSet/>
       <dgm:spPr/>
       <dgm:t>
@@ -991,7 +2933,7 @@
         </a:p>
       </dgm:t>
     </dgm:pt>
-    <dgm:pt modelId="{C310D818-D588-4934-AC58-2DB0A654FC86}">
+    <dgm:pt modelId="{24A5EF02-7451-480E-B994-8E31E8D02AEF}">
       <dgm:prSet phldrT="[文本]"/>
       <dgm:spPr/>
       <dgm:t>
@@ -1010,7 +2952,7 @@
         </a:p>
       </dgm:t>
     </dgm:pt>
-    <dgm:pt modelId="{BFE8927D-C0AA-44B4-8D78-1A18B8BDFCF8}" type="parTrans" cxnId="{5A1C1D8D-F1F0-4DB0-ABAB-EB0FC0E8CB43}">
+    <dgm:pt modelId="{5E19518B-4D6C-47C8-AB77-9ECFA69F472A}" type="parTrans" cxnId="{AED29EAD-ADAC-4AD2-A925-E04812945DAB}">
       <dgm:prSet/>
       <dgm:spPr/>
       <dgm:t>
@@ -1021,7 +2963,7 @@
         </a:p>
       </dgm:t>
     </dgm:pt>
-    <dgm:pt modelId="{B56EAF06-17E8-4402-BA96-37B3DC9992CC}" type="sibTrans" cxnId="{5A1C1D8D-F1F0-4DB0-ABAB-EB0FC0E8CB43}">
+    <dgm:pt modelId="{C0211326-09D0-46ED-993C-242F89E9312B}" type="sibTrans" cxnId="{AED29EAD-ADAC-4AD2-A925-E04812945DAB}">
       <dgm:prSet/>
       <dgm:spPr/>
       <dgm:t>
@@ -1032,7 +2974,7 @@
         </a:p>
       </dgm:t>
     </dgm:pt>
-    <dgm:pt modelId="{2A86B391-E444-4FEA-8357-E17D4894B1BB}">
+    <dgm:pt modelId="{0BF13D10-100E-47FA-8212-1F2C138322FF}">
       <dgm:prSet phldrT="[文本]"/>
       <dgm:spPr/>
       <dgm:t>
@@ -1051,7 +2993,7 @@
         </a:p>
       </dgm:t>
     </dgm:pt>
-    <dgm:pt modelId="{FED78686-7C24-4B3E-99AC-0BF1D3419695}" type="parTrans" cxnId="{C9C7C388-331A-4C2F-BAF6-841BC142B8C6}">
+    <dgm:pt modelId="{080663D5-49DA-45B1-85CA-E3106B64EEF5}" type="parTrans" cxnId="{997EBDFB-3603-41AF-A0C9-F3C4545D3AFD}">
       <dgm:prSet/>
       <dgm:spPr/>
       <dgm:t>
@@ -1062,7 +3004,7 @@
         </a:p>
       </dgm:t>
     </dgm:pt>
-    <dgm:pt modelId="{F8758026-7284-4A9A-AFF4-E73EEBB061BC}" type="sibTrans" cxnId="{C9C7C388-331A-4C2F-BAF6-841BC142B8C6}">
+    <dgm:pt modelId="{714C61D9-0E89-4CCF-93B6-2DB53CCC34F3}" type="sibTrans" cxnId="{997EBDFB-3603-41AF-A0C9-F3C4545D3AFD}">
       <dgm:prSet/>
       <dgm:spPr/>
       <dgm:t>
@@ -1073,8 +3015,8 @@
         </a:p>
       </dgm:t>
     </dgm:pt>
-    <dgm:pt modelId="{AEE9AB6F-209E-4CFC-9AF4-9C0889F465AA}" type="pres">
-      <dgm:prSet presAssocID="{3674C917-9D07-45F0-991C-45AD4C2FF7C6}" presName="diagram" presStyleCnt="0">
+    <dgm:pt modelId="{F61ED76C-44E3-4D77-942D-B84799E093F8}" type="pres">
+      <dgm:prSet presAssocID="{7D81F685-4E6B-401D-B0DF-8DD090C41A36}" presName="diagram" presStyleCnt="0">
         <dgm:presLayoutVars>
           <dgm:dir/>
           <dgm:resizeHandles val="exact"/>
@@ -1082,56 +3024,56 @@
       </dgm:prSet>
       <dgm:spPr/>
     </dgm:pt>
-    <dgm:pt modelId="{FFE21CBA-CCDD-4281-9C8A-E232B67A3A2F}" type="pres">
-      <dgm:prSet presAssocID="{84F1FC79-315D-4B85-91B0-15AF9862199D}" presName="node" presStyleLbl="node1" presStyleIdx="0" presStyleCnt="5">
+    <dgm:pt modelId="{AAE580DE-C5E4-4045-9684-E3E9F2D01897}" type="pres">
+      <dgm:prSet presAssocID="{87D0C682-218B-459A-84A9-6E5C1460E3EB}" presName="node" presStyleLbl="node1" presStyleIdx="0" presStyleCnt="5">
         <dgm:presLayoutVars>
           <dgm:bulletEnabled val="1"/>
         </dgm:presLayoutVars>
       </dgm:prSet>
       <dgm:spPr/>
     </dgm:pt>
-    <dgm:pt modelId="{1B49789C-C5F1-4FA8-B916-EB07CB825A99}" type="pres">
-      <dgm:prSet presAssocID="{DA372E09-9D8B-4204-9675-232D73B8720A}" presName="sibTrans" presStyleCnt="0"/>
+    <dgm:pt modelId="{422211F7-EB43-405C-9FCB-F2BCD9DB4CEB}" type="pres">
+      <dgm:prSet presAssocID="{083B6E12-240E-42D8-914B-ADC0908A17AB}" presName="sibTrans" presStyleCnt="0"/>
       <dgm:spPr/>
     </dgm:pt>
-    <dgm:pt modelId="{AC3437E1-3F1B-4B83-B80E-8914EB101AE2}" type="pres">
-      <dgm:prSet presAssocID="{5A76E1FA-9E76-4123-8314-326EFD1680D9}" presName="node" presStyleLbl="node1" presStyleIdx="1" presStyleCnt="5">
+    <dgm:pt modelId="{B3C8E17D-1927-4927-AE81-5C1968CAD583}" type="pres">
+      <dgm:prSet presAssocID="{9D4D23BC-4240-4F15-977F-6103A7A10FB2}" presName="node" presStyleLbl="node1" presStyleIdx="1" presStyleCnt="5">
         <dgm:presLayoutVars>
           <dgm:bulletEnabled val="1"/>
         </dgm:presLayoutVars>
       </dgm:prSet>
       <dgm:spPr/>
     </dgm:pt>
-    <dgm:pt modelId="{26DAD59C-AF48-42D9-BC98-83A1BA199D23}" type="pres">
-      <dgm:prSet presAssocID="{18E18A1B-A1E1-46F1-BD03-B0964F04A5DB}" presName="sibTrans" presStyleCnt="0"/>
+    <dgm:pt modelId="{79DEC9F9-4EC5-496D-8920-DECE4CF0EA32}" type="pres">
+      <dgm:prSet presAssocID="{B568A5CE-CA8A-48D5-9B2E-434651496262}" presName="sibTrans" presStyleCnt="0"/>
       <dgm:spPr/>
     </dgm:pt>
-    <dgm:pt modelId="{8654F531-9870-4D4A-AE3A-D40F2A145AD2}" type="pres">
-      <dgm:prSet presAssocID="{08841FA0-E2D8-4E61-9565-93CC5E312AE9}" presName="node" presStyleLbl="node1" presStyleIdx="2" presStyleCnt="5">
+    <dgm:pt modelId="{58663AE0-1B97-4DB5-8A19-8C642E36D303}" type="pres">
+      <dgm:prSet presAssocID="{AFD7CD7F-46E4-4954-B8AE-50ABB6D6822A}" presName="node" presStyleLbl="node1" presStyleIdx="2" presStyleCnt="5">
         <dgm:presLayoutVars>
           <dgm:bulletEnabled val="1"/>
         </dgm:presLayoutVars>
       </dgm:prSet>
       <dgm:spPr/>
     </dgm:pt>
-    <dgm:pt modelId="{B522B1EB-B72C-484E-A8A2-64833AE3F61B}" type="pres">
-      <dgm:prSet presAssocID="{A1E3295C-19FF-48EB-8BEC-ADFFD12BA8C2}" presName="sibTrans" presStyleCnt="0"/>
+    <dgm:pt modelId="{24E72752-2822-4D13-A206-AF91504CA15C}" type="pres">
+      <dgm:prSet presAssocID="{879ADB0D-F85E-42A5-9D7A-6DA25E31C4DC}" presName="sibTrans" presStyleCnt="0"/>
       <dgm:spPr/>
     </dgm:pt>
-    <dgm:pt modelId="{B940C21E-C49E-4650-9981-58BB44CE2F42}" type="pres">
-      <dgm:prSet presAssocID="{C310D818-D588-4934-AC58-2DB0A654FC86}" presName="node" presStyleLbl="node1" presStyleIdx="3" presStyleCnt="5">
+    <dgm:pt modelId="{AF1DF682-0665-4F0A-9D85-6BE8F2987DE7}" type="pres">
+      <dgm:prSet presAssocID="{24A5EF02-7451-480E-B994-8E31E8D02AEF}" presName="node" presStyleLbl="node1" presStyleIdx="3" presStyleCnt="5">
         <dgm:presLayoutVars>
           <dgm:bulletEnabled val="1"/>
         </dgm:presLayoutVars>
       </dgm:prSet>
       <dgm:spPr/>
     </dgm:pt>
-    <dgm:pt modelId="{13E7C454-B51D-4C76-8D24-359D2D5BDC13}" type="pres">
-      <dgm:prSet presAssocID="{B56EAF06-17E8-4402-BA96-37B3DC9992CC}" presName="sibTrans" presStyleCnt="0"/>
+    <dgm:pt modelId="{41934A92-7912-496A-BF5C-A8897D3CC768}" type="pres">
+      <dgm:prSet presAssocID="{C0211326-09D0-46ED-993C-242F89E9312B}" presName="sibTrans" presStyleCnt="0"/>
       <dgm:spPr/>
     </dgm:pt>
-    <dgm:pt modelId="{59ABCD57-F696-4E4E-AFA1-F4E16B6ED0D7}" type="pres">
-      <dgm:prSet presAssocID="{2A86B391-E444-4FEA-8357-E17D4894B1BB}" presName="node" presStyleLbl="node1" presStyleIdx="4" presStyleCnt="5">
+    <dgm:pt modelId="{239D47AE-0ED6-4909-A1F2-8C9100A0363A}" type="pres">
+      <dgm:prSet presAssocID="{0BF13D10-100E-47FA-8212-1F2C138322FF}" presName="node" presStyleLbl="node1" presStyleIdx="4" presStyleCnt="5">
         <dgm:presLayoutVars>
           <dgm:bulletEnabled val="1"/>
         </dgm:presLayoutVars>
@@ -1140,26 +3082,26 @@
     </dgm:pt>
   </dgm:ptLst>
   <dgm:cxnLst>
-    <dgm:cxn modelId="{1EBA4F04-C246-4F58-A24A-1C8E7F0CA755}" srcId="{3674C917-9D07-45F0-991C-45AD4C2FF7C6}" destId="{5A76E1FA-9E76-4123-8314-326EFD1680D9}" srcOrd="1" destOrd="0" parTransId="{3D3E7756-FC52-4076-805C-33CA417ACACB}" sibTransId="{18E18A1B-A1E1-46F1-BD03-B0964F04A5DB}"/>
-    <dgm:cxn modelId="{00B59C0F-3AD2-4233-B2F0-FE0EF96F9989}" type="presOf" srcId="{2A86B391-E444-4FEA-8357-E17D4894B1BB}" destId="{59ABCD57-F696-4E4E-AFA1-F4E16B6ED0D7}" srcOrd="0" destOrd="0" presId="urn:microsoft.com/office/officeart/2005/8/layout/default"/>
-    <dgm:cxn modelId="{92988836-BB95-4E13-B181-9CAA553BDDA2}" type="presOf" srcId="{08841FA0-E2D8-4E61-9565-93CC5E312AE9}" destId="{8654F531-9870-4D4A-AE3A-D40F2A145AD2}" srcOrd="0" destOrd="0" presId="urn:microsoft.com/office/officeart/2005/8/layout/default"/>
-    <dgm:cxn modelId="{6CE3384A-1EE2-4F2F-B8E7-297FEB8CDA1E}" type="presOf" srcId="{C310D818-D588-4934-AC58-2DB0A654FC86}" destId="{B940C21E-C49E-4650-9981-58BB44CE2F42}" srcOrd="0" destOrd="0" presId="urn:microsoft.com/office/officeart/2005/8/layout/default"/>
-    <dgm:cxn modelId="{A152DC7A-5EFD-4117-9F5A-3863625F1F10}" type="presOf" srcId="{3674C917-9D07-45F0-991C-45AD4C2FF7C6}" destId="{AEE9AB6F-209E-4CFC-9AF4-9C0889F465AA}" srcOrd="0" destOrd="0" presId="urn:microsoft.com/office/officeart/2005/8/layout/default"/>
-    <dgm:cxn modelId="{C9C7C388-331A-4C2F-BAF6-841BC142B8C6}" srcId="{3674C917-9D07-45F0-991C-45AD4C2FF7C6}" destId="{2A86B391-E444-4FEA-8357-E17D4894B1BB}" srcOrd="4" destOrd="0" parTransId="{FED78686-7C24-4B3E-99AC-0BF1D3419695}" sibTransId="{F8758026-7284-4A9A-AFF4-E73EEBB061BC}"/>
-    <dgm:cxn modelId="{5A1C1D8D-F1F0-4DB0-ABAB-EB0FC0E8CB43}" srcId="{3674C917-9D07-45F0-991C-45AD4C2FF7C6}" destId="{C310D818-D588-4934-AC58-2DB0A654FC86}" srcOrd="3" destOrd="0" parTransId="{BFE8927D-C0AA-44B4-8D78-1A18B8BDFCF8}" sibTransId="{B56EAF06-17E8-4402-BA96-37B3DC9992CC}"/>
-    <dgm:cxn modelId="{EFACBA9B-549C-424E-9983-24D408A3E888}" srcId="{3674C917-9D07-45F0-991C-45AD4C2FF7C6}" destId="{84F1FC79-315D-4B85-91B0-15AF9862199D}" srcOrd="0" destOrd="0" parTransId="{7552C116-45E2-440D-9F86-F64BE8153837}" sibTransId="{DA372E09-9D8B-4204-9675-232D73B8720A}"/>
-    <dgm:cxn modelId="{D2F4F9DD-719C-4AEF-BA11-BB619EB6C53F}" type="presOf" srcId="{5A76E1FA-9E76-4123-8314-326EFD1680D9}" destId="{AC3437E1-3F1B-4B83-B80E-8914EB101AE2}" srcOrd="0" destOrd="0" presId="urn:microsoft.com/office/officeart/2005/8/layout/default"/>
-    <dgm:cxn modelId="{7D0E4FE4-A415-4C71-BA83-140721A37CEE}" type="presOf" srcId="{84F1FC79-315D-4B85-91B0-15AF9862199D}" destId="{FFE21CBA-CCDD-4281-9C8A-E232B67A3A2F}" srcOrd="0" destOrd="0" presId="urn:microsoft.com/office/officeart/2005/8/layout/default"/>
-    <dgm:cxn modelId="{DB9C30EB-8821-40BF-B199-736FFFBA689F}" srcId="{3674C917-9D07-45F0-991C-45AD4C2FF7C6}" destId="{08841FA0-E2D8-4E61-9565-93CC5E312AE9}" srcOrd="2" destOrd="0" parTransId="{BAE0B844-49C3-40DE-B5FE-246FCEADF118}" sibTransId="{A1E3295C-19FF-48EB-8BEC-ADFFD12BA8C2}"/>
-    <dgm:cxn modelId="{111CB68E-DA82-4F23-847D-CE8BA78EBA44}" type="presParOf" srcId="{AEE9AB6F-209E-4CFC-9AF4-9C0889F465AA}" destId="{FFE21CBA-CCDD-4281-9C8A-E232B67A3A2F}" srcOrd="0" destOrd="0" presId="urn:microsoft.com/office/officeart/2005/8/layout/default"/>
-    <dgm:cxn modelId="{F3657FD4-6E59-404B-A1A1-2C18FCEB6CA7}" type="presParOf" srcId="{AEE9AB6F-209E-4CFC-9AF4-9C0889F465AA}" destId="{1B49789C-C5F1-4FA8-B916-EB07CB825A99}" srcOrd="1" destOrd="0" presId="urn:microsoft.com/office/officeart/2005/8/layout/default"/>
-    <dgm:cxn modelId="{39C0EBBE-526D-4203-ABC0-709A2B6325F0}" type="presParOf" srcId="{AEE9AB6F-209E-4CFC-9AF4-9C0889F465AA}" destId="{AC3437E1-3F1B-4B83-B80E-8914EB101AE2}" srcOrd="2" destOrd="0" presId="urn:microsoft.com/office/officeart/2005/8/layout/default"/>
-    <dgm:cxn modelId="{33ADEB65-CEFF-411C-B6CB-B39FFBC09405}" type="presParOf" srcId="{AEE9AB6F-209E-4CFC-9AF4-9C0889F465AA}" destId="{26DAD59C-AF48-42D9-BC98-83A1BA199D23}" srcOrd="3" destOrd="0" presId="urn:microsoft.com/office/officeart/2005/8/layout/default"/>
-    <dgm:cxn modelId="{CC690AAC-3843-4823-83C4-8449ACA908C8}" type="presParOf" srcId="{AEE9AB6F-209E-4CFC-9AF4-9C0889F465AA}" destId="{8654F531-9870-4D4A-AE3A-D40F2A145AD2}" srcOrd="4" destOrd="0" presId="urn:microsoft.com/office/officeart/2005/8/layout/default"/>
-    <dgm:cxn modelId="{C9F74C17-7043-4681-B44A-8457F0AB96F8}" type="presParOf" srcId="{AEE9AB6F-209E-4CFC-9AF4-9C0889F465AA}" destId="{B522B1EB-B72C-484E-A8A2-64833AE3F61B}" srcOrd="5" destOrd="0" presId="urn:microsoft.com/office/officeart/2005/8/layout/default"/>
-    <dgm:cxn modelId="{D9477944-3480-4786-9433-907A0E06B7B1}" type="presParOf" srcId="{AEE9AB6F-209E-4CFC-9AF4-9C0889F465AA}" destId="{B940C21E-C49E-4650-9981-58BB44CE2F42}" srcOrd="6" destOrd="0" presId="urn:microsoft.com/office/officeart/2005/8/layout/default"/>
-    <dgm:cxn modelId="{16B03C34-A3D8-49B5-BD7B-ADD8B8E5BB65}" type="presParOf" srcId="{AEE9AB6F-209E-4CFC-9AF4-9C0889F465AA}" destId="{13E7C454-B51D-4C76-8D24-359D2D5BDC13}" srcOrd="7" destOrd="0" presId="urn:microsoft.com/office/officeart/2005/8/layout/default"/>
-    <dgm:cxn modelId="{8D67F41E-FB21-41CD-BF51-F866EBB9C1AF}" type="presParOf" srcId="{AEE9AB6F-209E-4CFC-9AF4-9C0889F465AA}" destId="{59ABCD57-F696-4E4E-AFA1-F4E16B6ED0D7}" srcOrd="8" destOrd="0" presId="urn:microsoft.com/office/officeart/2005/8/layout/default"/>
+    <dgm:cxn modelId="{6A684973-2F67-4E3B-916B-086B1DB6B908}" type="presOf" srcId="{24A5EF02-7451-480E-B994-8E31E8D02AEF}" destId="{AF1DF682-0665-4F0A-9D85-6BE8F2987DE7}" srcOrd="0" destOrd="0" presId="urn:microsoft.com/office/officeart/2005/8/layout/default"/>
+    <dgm:cxn modelId="{94B188A0-C82D-4918-A377-398E575C83DB}" srcId="{7D81F685-4E6B-401D-B0DF-8DD090C41A36}" destId="{87D0C682-218B-459A-84A9-6E5C1460E3EB}" srcOrd="0" destOrd="0" parTransId="{8147F584-7698-452F-96B3-90E922EB3772}" sibTransId="{083B6E12-240E-42D8-914B-ADC0908A17AB}"/>
+    <dgm:cxn modelId="{AED29EAD-ADAC-4AD2-A925-E04812945DAB}" srcId="{7D81F685-4E6B-401D-B0DF-8DD090C41A36}" destId="{24A5EF02-7451-480E-B994-8E31E8D02AEF}" srcOrd="3" destOrd="0" parTransId="{5E19518B-4D6C-47C8-AB77-9ECFA69F472A}" sibTransId="{C0211326-09D0-46ED-993C-242F89E9312B}"/>
+    <dgm:cxn modelId="{0C3E33B1-5FA8-4DF8-BA99-7D357BA5A098}" srcId="{7D81F685-4E6B-401D-B0DF-8DD090C41A36}" destId="{AFD7CD7F-46E4-4954-B8AE-50ABB6D6822A}" srcOrd="2" destOrd="0" parTransId="{D9A8E820-9AF4-4DAE-8793-BAC1341E0ADC}" sibTransId="{879ADB0D-F85E-42A5-9D7A-6DA25E31C4DC}"/>
+    <dgm:cxn modelId="{560FF1C3-64B9-4AA5-A132-236B11201E47}" type="presOf" srcId="{9D4D23BC-4240-4F15-977F-6103A7A10FB2}" destId="{B3C8E17D-1927-4927-AE81-5C1968CAD583}" srcOrd="0" destOrd="0" presId="urn:microsoft.com/office/officeart/2005/8/layout/default"/>
+    <dgm:cxn modelId="{04A9ACDD-7C96-4E4A-964C-2257740EFB44}" type="presOf" srcId="{7D81F685-4E6B-401D-B0DF-8DD090C41A36}" destId="{F61ED76C-44E3-4D77-942D-B84799E093F8}" srcOrd="0" destOrd="0" presId="urn:microsoft.com/office/officeart/2005/8/layout/default"/>
+    <dgm:cxn modelId="{88DAF3EB-96C0-4576-A279-F7DA92E54E80}" type="presOf" srcId="{87D0C682-218B-459A-84A9-6E5C1460E3EB}" destId="{AAE580DE-C5E4-4045-9684-E3E9F2D01897}" srcOrd="0" destOrd="0" presId="urn:microsoft.com/office/officeart/2005/8/layout/default"/>
+    <dgm:cxn modelId="{0A56B8EC-4D86-4DBE-934C-F144691711B9}" srcId="{7D81F685-4E6B-401D-B0DF-8DD090C41A36}" destId="{9D4D23BC-4240-4F15-977F-6103A7A10FB2}" srcOrd="1" destOrd="0" parTransId="{D7DF6BC9-1207-45E4-89AF-48A68E967E71}" sibTransId="{B568A5CE-CA8A-48D5-9B2E-434651496262}"/>
+    <dgm:cxn modelId="{8B9E0FF5-64D7-4DF3-8EFE-E511D6A7FECC}" type="presOf" srcId="{AFD7CD7F-46E4-4954-B8AE-50ABB6D6822A}" destId="{58663AE0-1B97-4DB5-8A19-8C642E36D303}" srcOrd="0" destOrd="0" presId="urn:microsoft.com/office/officeart/2005/8/layout/default"/>
+    <dgm:cxn modelId="{00E134F6-45E7-49C0-B0EE-169F570CC29B}" type="presOf" srcId="{0BF13D10-100E-47FA-8212-1F2C138322FF}" destId="{239D47AE-0ED6-4909-A1F2-8C9100A0363A}" srcOrd="0" destOrd="0" presId="urn:microsoft.com/office/officeart/2005/8/layout/default"/>
+    <dgm:cxn modelId="{997EBDFB-3603-41AF-A0C9-F3C4545D3AFD}" srcId="{7D81F685-4E6B-401D-B0DF-8DD090C41A36}" destId="{0BF13D10-100E-47FA-8212-1F2C138322FF}" srcOrd="4" destOrd="0" parTransId="{080663D5-49DA-45B1-85CA-E3106B64EEF5}" sibTransId="{714C61D9-0E89-4CCF-93B6-2DB53CCC34F3}"/>
+    <dgm:cxn modelId="{DA3784B4-AFB4-4AE4-A824-AF116E966A6D}" type="presParOf" srcId="{F61ED76C-44E3-4D77-942D-B84799E093F8}" destId="{AAE580DE-C5E4-4045-9684-E3E9F2D01897}" srcOrd="0" destOrd="0" presId="urn:microsoft.com/office/officeart/2005/8/layout/default"/>
+    <dgm:cxn modelId="{1F6A9AAE-E55B-4506-B280-CD6CBEE0DC58}" type="presParOf" srcId="{F61ED76C-44E3-4D77-942D-B84799E093F8}" destId="{422211F7-EB43-405C-9FCB-F2BCD9DB4CEB}" srcOrd="1" destOrd="0" presId="urn:microsoft.com/office/officeart/2005/8/layout/default"/>
+    <dgm:cxn modelId="{2827DCBE-49E8-4C08-B3AF-1756465C7445}" type="presParOf" srcId="{F61ED76C-44E3-4D77-942D-B84799E093F8}" destId="{B3C8E17D-1927-4927-AE81-5C1968CAD583}" srcOrd="2" destOrd="0" presId="urn:microsoft.com/office/officeart/2005/8/layout/default"/>
+    <dgm:cxn modelId="{62FC4F2D-0490-47A2-A993-BC837BFCFADD}" type="presParOf" srcId="{F61ED76C-44E3-4D77-942D-B84799E093F8}" destId="{79DEC9F9-4EC5-496D-8920-DECE4CF0EA32}" srcOrd="3" destOrd="0" presId="urn:microsoft.com/office/officeart/2005/8/layout/default"/>
+    <dgm:cxn modelId="{533CD366-1A4E-4F4C-8216-8FF252D2EB3D}" type="presParOf" srcId="{F61ED76C-44E3-4D77-942D-B84799E093F8}" destId="{58663AE0-1B97-4DB5-8A19-8C642E36D303}" srcOrd="4" destOrd="0" presId="urn:microsoft.com/office/officeart/2005/8/layout/default"/>
+    <dgm:cxn modelId="{BF85464D-9E20-44B5-9458-54B217C396E0}" type="presParOf" srcId="{F61ED76C-44E3-4D77-942D-B84799E093F8}" destId="{24E72752-2822-4D13-A206-AF91504CA15C}" srcOrd="5" destOrd="0" presId="urn:microsoft.com/office/officeart/2005/8/layout/default"/>
+    <dgm:cxn modelId="{44943C94-B0F9-4298-BA19-4BAFB980714E}" type="presParOf" srcId="{F61ED76C-44E3-4D77-942D-B84799E093F8}" destId="{AF1DF682-0665-4F0A-9D85-6BE8F2987DE7}" srcOrd="6" destOrd="0" presId="urn:microsoft.com/office/officeart/2005/8/layout/default"/>
+    <dgm:cxn modelId="{B8E95347-EB14-49A3-8F02-2A719DA4DF7F}" type="presParOf" srcId="{F61ED76C-44E3-4D77-942D-B84799E093F8}" destId="{41934A92-7912-496A-BF5C-A8897D3CC768}" srcOrd="7" destOrd="0" presId="urn:microsoft.com/office/officeart/2005/8/layout/default"/>
+    <dgm:cxn modelId="{945BA24A-C28B-4398-ABF7-5D82C6ABEB4D}" type="presParOf" srcId="{F61ED76C-44E3-4D77-942D-B84799E093F8}" destId="{239D47AE-0ED6-4909-A1F2-8C9100A0363A}" srcOrd="8" destOrd="0" presId="urn:microsoft.com/office/officeart/2005/8/layout/default"/>
   </dgm:cxnLst>
   <dgm:bg/>
   <dgm:whole/>
@@ -1179,7 +3121,7 @@
       <dsp:cNvGrpSpPr/>
     </dsp:nvGrpSpPr>
     <dsp:grpSpPr/>
-    <dsp:sp modelId="{FFE21CBA-CCDD-4281-9C8A-E232B67A3A2F}">
+    <dsp:sp modelId="{AAE580DE-C5E4-4045-9684-E3E9F2D01897}">
       <dsp:nvSpPr>
         <dsp:cNvPr id="0" name=""/>
         <dsp:cNvSpPr/>
@@ -1262,7 +3204,7 @@
         <a:ext cx="3333749" cy="2000250"/>
       </dsp:txXfrm>
     </dsp:sp>
-    <dsp:sp modelId="{AC3437E1-3F1B-4B83-B80E-8914EB101AE2}">
+    <dsp:sp modelId="{B3C8E17D-1927-4927-AE81-5C1968CAD583}">
       <dsp:nvSpPr>
         <dsp:cNvPr id="0" name=""/>
         <dsp:cNvSpPr/>
@@ -1345,7 +3287,7 @@
         <a:ext cx="3333749" cy="2000250"/>
       </dsp:txXfrm>
     </dsp:sp>
-    <dsp:sp modelId="{8654F531-9870-4D4A-AE3A-D40F2A145AD2}">
+    <dsp:sp modelId="{58663AE0-1B97-4DB5-8A19-8C642E36D303}">
       <dsp:nvSpPr>
         <dsp:cNvPr id="0" name=""/>
         <dsp:cNvSpPr/>
@@ -1428,7 +3370,7 @@
         <a:ext cx="3333749" cy="2000250"/>
       </dsp:txXfrm>
     </dsp:sp>
-    <dsp:sp modelId="{B940C21E-C49E-4650-9981-58BB44CE2F42}">
+    <dsp:sp modelId="{AF1DF682-0665-4F0A-9D85-6BE8F2987DE7}">
       <dsp:nvSpPr>
         <dsp:cNvPr id="0" name=""/>
         <dsp:cNvSpPr/>
@@ -1511,7 +3453,7 @@
         <a:ext cx="3333749" cy="2000250"/>
       </dsp:txXfrm>
     </dsp:sp>
-    <dsp:sp modelId="{59ABCD57-F696-4E4E-AFA1-F4E16B6ED0D7}">
+    <dsp:sp modelId="{239D47AE-0ED6-4909-A1F2-8C9100A0363A}">
       <dsp:nvSpPr>
         <dsp:cNvPr id="0" name=""/>
         <dsp:cNvSpPr/>
@@ -2801,7 +4743,7 @@
           <p:cNvPr id="2" name="标题 1">
             <a:extLst>
               <a:ext uri="{FF2B5EF4-FFF2-40B4-BE49-F238E27FC236}">
-                <a16:creationId xmlns:a16="http://schemas.microsoft.com/office/drawing/2014/main" id="{65C29DDA-3B30-7782-BBB1-8B64FB393164}"/>
+                <a16:creationId xmlns:a16="http://schemas.microsoft.com/office/drawing/2014/main" id="{A9365428-8773-AB43-69BB-17A6EFD2604D}"/>
               </a:ext>
             </a:extLst>
           </p:cNvPr>
@@ -2838,7 +4780,7 @@
           <p:cNvPr id="3" name="副标题 2">
             <a:extLst>
               <a:ext uri="{FF2B5EF4-FFF2-40B4-BE49-F238E27FC236}">
-                <a16:creationId xmlns:a16="http://schemas.microsoft.com/office/drawing/2014/main" id="{554C7407-E2B2-BE28-1AB7-CDFF05C024DB}"/>
+                <a16:creationId xmlns:a16="http://schemas.microsoft.com/office/drawing/2014/main" id="{FA70F38F-712A-2A93-4F4D-AEBDBF07B204}"/>
               </a:ext>
             </a:extLst>
           </p:cNvPr>
@@ -2908,7 +4850,7 @@
           <p:cNvPr id="4" name="日期占位符 3">
             <a:extLst>
               <a:ext uri="{FF2B5EF4-FFF2-40B4-BE49-F238E27FC236}">
-                <a16:creationId xmlns:a16="http://schemas.microsoft.com/office/drawing/2014/main" id="{F76A1896-199E-8EEE-42DF-9B7AA6249F1F}"/>
+                <a16:creationId xmlns:a16="http://schemas.microsoft.com/office/drawing/2014/main" id="{733F3A2C-FBC2-F87A-B543-7C462376B520}"/>
               </a:ext>
             </a:extLst>
           </p:cNvPr>
@@ -2924,7 +4866,7 @@
           <a:bodyPr/>
           <a:lstStyle/>
           <a:p>
-            <a:fld id="{7EB75B3C-5007-4530-8716-49195C2E46F5}" type="datetimeFigureOut">
+            <a:fld id="{7015EA8C-A5F6-4D14-9EE3-F54867C5780F}" type="datetimeFigureOut">
               <a:rPr lang="zh-CN" altLang="en-US" smtClean="0"/>
               <a:t>2026/10/13</a:t>
             </a:fld>
@@ -2937,7 +4879,7 @@
           <p:cNvPr id="5" name="页脚占位符 4">
             <a:extLst>
               <a:ext uri="{FF2B5EF4-FFF2-40B4-BE49-F238E27FC236}">
-                <a16:creationId xmlns:a16="http://schemas.microsoft.com/office/drawing/2014/main" id="{68107055-61BF-2D18-2B49-290517A1EC26}"/>
+                <a16:creationId xmlns:a16="http://schemas.microsoft.com/office/drawing/2014/main" id="{E226C80C-34E7-960E-4287-CA8F1F39A1EA}"/>
               </a:ext>
             </a:extLst>
           </p:cNvPr>
@@ -2962,7 +4904,7 @@
           <p:cNvPr id="6" name="灯片编号占位符 5">
             <a:extLst>
               <a:ext uri="{FF2B5EF4-FFF2-40B4-BE49-F238E27FC236}">
-                <a16:creationId xmlns:a16="http://schemas.microsoft.com/office/drawing/2014/main" id="{1F12ABD2-F7B0-0B0F-B1BF-549120453833}"/>
+                <a16:creationId xmlns:a16="http://schemas.microsoft.com/office/drawing/2014/main" id="{7D336F31-5C62-6235-6237-442F99EEB92B}"/>
               </a:ext>
             </a:extLst>
           </p:cNvPr>
@@ -2978,7 +4920,7 @@
           <a:bodyPr/>
           <a:lstStyle/>
           <a:p>
-            <a:fld id="{6A2FB4F2-CD24-4476-8476-8C85252174F8}" type="slidenum">
+            <a:fld id="{62AC4BB8-FA70-4F42-80C8-87D87CE0B4C4}" type="slidenum">
               <a:rPr lang="zh-CN" altLang="en-US" smtClean="0"/>
               <a:t>‹#›</a:t>
             </a:fld>
@@ -2989,7 +4931,7 @@
     </p:spTree>
     <p:extLst>
       <p:ext uri="{BB962C8B-B14F-4D97-AF65-F5344CB8AC3E}">
-        <p14:creationId xmlns:p14="http://schemas.microsoft.com/office/powerpoint/2010/main" val="436190693"/>
+        <p14:creationId xmlns:p14="http://schemas.microsoft.com/office/powerpoint/2010/main" val="3245906520"/>
       </p:ext>
     </p:extLst>
   </p:cSld>
@@ -3021,7 +4963,7 @@
           <p:cNvPr id="2" name="标题 1">
             <a:extLst>
               <a:ext uri="{FF2B5EF4-FFF2-40B4-BE49-F238E27FC236}">
-                <a16:creationId xmlns:a16="http://schemas.microsoft.com/office/drawing/2014/main" id="{A5B6EEAB-2867-30FD-078D-187A76B5AE2F}"/>
+                <a16:creationId xmlns:a16="http://schemas.microsoft.com/office/drawing/2014/main" id="{ACD407F5-3496-3340-C4C1-EBD3DD0C71F6}"/>
               </a:ext>
             </a:extLst>
           </p:cNvPr>
@@ -3049,7 +4991,7 @@
           <p:cNvPr id="3" name="竖排文字占位符 2">
             <a:extLst>
               <a:ext uri="{FF2B5EF4-FFF2-40B4-BE49-F238E27FC236}">
-                <a16:creationId xmlns:a16="http://schemas.microsoft.com/office/drawing/2014/main" id="{F1F5E178-417C-D795-9E14-0F57CEF66EF1}"/>
+                <a16:creationId xmlns:a16="http://schemas.microsoft.com/office/drawing/2014/main" id="{391ECC05-7729-DB6B-260F-1BC9B844F413}"/>
               </a:ext>
             </a:extLst>
           </p:cNvPr>
@@ -3106,7 +5048,7 @@
           <p:cNvPr id="4" name="日期占位符 3">
             <a:extLst>
               <a:ext uri="{FF2B5EF4-FFF2-40B4-BE49-F238E27FC236}">
-                <a16:creationId xmlns:a16="http://schemas.microsoft.com/office/drawing/2014/main" id="{D03E0E2E-2EAD-2513-76B8-456D88E70C20}"/>
+                <a16:creationId xmlns:a16="http://schemas.microsoft.com/office/drawing/2014/main" id="{BF9389E1-2458-E267-7F12-AF073BC3BA49}"/>
               </a:ext>
             </a:extLst>
           </p:cNvPr>
@@ -3122,7 +5064,7 @@
           <a:bodyPr/>
           <a:lstStyle/>
           <a:p>
-            <a:fld id="{7EB75B3C-5007-4530-8716-49195C2E46F5}" type="datetimeFigureOut">
+            <a:fld id="{7015EA8C-A5F6-4D14-9EE3-F54867C5780F}" type="datetimeFigureOut">
               <a:rPr lang="zh-CN" altLang="en-US" smtClean="0"/>
               <a:t>2026/10/13</a:t>
             </a:fld>
@@ -3135,7 +5077,7 @@
           <p:cNvPr id="5" name="页脚占位符 4">
             <a:extLst>
               <a:ext uri="{FF2B5EF4-FFF2-40B4-BE49-F238E27FC236}">
-                <a16:creationId xmlns:a16="http://schemas.microsoft.com/office/drawing/2014/main" id="{AA9A7BC7-745A-185F-EB85-0F18DC781E30}"/>
+                <a16:creationId xmlns:a16="http://schemas.microsoft.com/office/drawing/2014/main" id="{C45A3310-850D-18AD-47C6-627ED3851EFF}"/>
               </a:ext>
             </a:extLst>
           </p:cNvPr>
@@ -3160,7 +5102,7 @@
           <p:cNvPr id="6" name="灯片编号占位符 5">
             <a:extLst>
               <a:ext uri="{FF2B5EF4-FFF2-40B4-BE49-F238E27FC236}">
-                <a16:creationId xmlns:a16="http://schemas.microsoft.com/office/drawing/2014/main" id="{28205AAC-6501-F7A4-89CA-934DDFB19498}"/>
+                <a16:creationId xmlns:a16="http://schemas.microsoft.com/office/drawing/2014/main" id="{2F70925D-328D-4799-7ED8-A8B52711D71E}"/>
               </a:ext>
             </a:extLst>
           </p:cNvPr>
@@ -3176,7 +5118,7 @@
           <a:bodyPr/>
           <a:lstStyle/>
           <a:p>
-            <a:fld id="{6A2FB4F2-CD24-4476-8476-8C85252174F8}" type="slidenum">
+            <a:fld id="{62AC4BB8-FA70-4F42-80C8-87D87CE0B4C4}" type="slidenum">
               <a:rPr lang="zh-CN" altLang="en-US" smtClean="0"/>
               <a:t>‹#›</a:t>
             </a:fld>
@@ -3187,7 +5129,7 @@
     </p:spTree>
     <p:extLst>
       <p:ext uri="{BB962C8B-B14F-4D97-AF65-F5344CB8AC3E}">
-        <p14:creationId xmlns:p14="http://schemas.microsoft.com/office/powerpoint/2010/main" val="1512791280"/>
+        <p14:creationId xmlns:p14="http://schemas.microsoft.com/office/powerpoint/2010/main" val="3206980038"/>
       </p:ext>
     </p:extLst>
   </p:cSld>
@@ -3219,7 +5161,7 @@
           <p:cNvPr id="2" name="竖排标题 1">
             <a:extLst>
               <a:ext uri="{FF2B5EF4-FFF2-40B4-BE49-F238E27FC236}">
-                <a16:creationId xmlns:a16="http://schemas.microsoft.com/office/drawing/2014/main" id="{9BA35F90-F683-B011-787E-3FF650F5F490}"/>
+                <a16:creationId xmlns:a16="http://schemas.microsoft.com/office/drawing/2014/main" id="{9C69D7AD-6F0B-7DEE-8F23-05E68BE23405}"/>
               </a:ext>
             </a:extLst>
           </p:cNvPr>
@@ -3252,7 +5194,7 @@
           <p:cNvPr id="3" name="竖排文字占位符 2">
             <a:extLst>
               <a:ext uri="{FF2B5EF4-FFF2-40B4-BE49-F238E27FC236}">
-                <a16:creationId xmlns:a16="http://schemas.microsoft.com/office/drawing/2014/main" id="{B8B7B818-5279-21BA-41B9-6CD25595096B}"/>
+                <a16:creationId xmlns:a16="http://schemas.microsoft.com/office/drawing/2014/main" id="{BFEEDAC4-EB68-E00D-BA59-4B63BEC9B063}"/>
               </a:ext>
             </a:extLst>
           </p:cNvPr>
@@ -3314,7 +5256,7 @@
           <p:cNvPr id="4" name="日期占位符 3">
             <a:extLst>
               <a:ext uri="{FF2B5EF4-FFF2-40B4-BE49-F238E27FC236}">
-                <a16:creationId xmlns:a16="http://schemas.microsoft.com/office/drawing/2014/main" id="{E39ED693-1641-987E-D60A-3805779A8F22}"/>
+                <a16:creationId xmlns:a16="http://schemas.microsoft.com/office/drawing/2014/main" id="{856A3DC8-A6AA-327E-5F70-FA66BD1890B6}"/>
               </a:ext>
             </a:extLst>
           </p:cNvPr>
@@ -3330,7 +5272,7 @@
           <a:bodyPr/>
           <a:lstStyle/>
           <a:p>
-            <a:fld id="{7EB75B3C-5007-4530-8716-49195C2E46F5}" type="datetimeFigureOut">
+            <a:fld id="{7015EA8C-A5F6-4D14-9EE3-F54867C5780F}" type="datetimeFigureOut">
               <a:rPr lang="zh-CN" altLang="en-US" smtClean="0"/>
               <a:t>2026/10/13</a:t>
             </a:fld>
@@ -3343,7 +5285,7 @@
           <p:cNvPr id="5" name="页脚占位符 4">
             <a:extLst>
               <a:ext uri="{FF2B5EF4-FFF2-40B4-BE49-F238E27FC236}">
-                <a16:creationId xmlns:a16="http://schemas.microsoft.com/office/drawing/2014/main" id="{323235F1-B637-B176-E8C0-D7BAED433C2B}"/>
+                <a16:creationId xmlns:a16="http://schemas.microsoft.com/office/drawing/2014/main" id="{B101E396-6E6C-8C13-14AB-D4D2CDB4AC96}"/>
               </a:ext>
             </a:extLst>
           </p:cNvPr>
@@ -3368,7 +5310,7 @@
           <p:cNvPr id="6" name="灯片编号占位符 5">
             <a:extLst>
               <a:ext uri="{FF2B5EF4-FFF2-40B4-BE49-F238E27FC236}">
-                <a16:creationId xmlns:a16="http://schemas.microsoft.com/office/drawing/2014/main" id="{03EB5860-4186-9396-AEF9-2AC34C04B29A}"/>
+                <a16:creationId xmlns:a16="http://schemas.microsoft.com/office/drawing/2014/main" id="{6042270B-9BA3-66B1-EEF6-15A9D5899290}"/>
               </a:ext>
             </a:extLst>
           </p:cNvPr>
@@ -3384,7 +5326,7 @@
           <a:bodyPr/>
           <a:lstStyle/>
           <a:p>
-            <a:fld id="{6A2FB4F2-CD24-4476-8476-8C85252174F8}" type="slidenum">
+            <a:fld id="{62AC4BB8-FA70-4F42-80C8-87D87CE0B4C4}" type="slidenum">
               <a:rPr lang="zh-CN" altLang="en-US" smtClean="0"/>
               <a:t>‹#›</a:t>
             </a:fld>
@@ -3395,7 +5337,7 @@
     </p:spTree>
     <p:extLst>
       <p:ext uri="{BB962C8B-B14F-4D97-AF65-F5344CB8AC3E}">
-        <p14:creationId xmlns:p14="http://schemas.microsoft.com/office/powerpoint/2010/main" val="31339972"/>
+        <p14:creationId xmlns:p14="http://schemas.microsoft.com/office/powerpoint/2010/main" val="3167954751"/>
       </p:ext>
     </p:extLst>
   </p:cSld>
@@ -3427,7 +5369,7 @@
           <p:cNvPr id="2" name="标题 1">
             <a:extLst>
               <a:ext uri="{FF2B5EF4-FFF2-40B4-BE49-F238E27FC236}">
-                <a16:creationId xmlns:a16="http://schemas.microsoft.com/office/drawing/2014/main" id="{9A296580-1F41-1E99-93F1-1000F6F1CEB1}"/>
+                <a16:creationId xmlns:a16="http://schemas.microsoft.com/office/drawing/2014/main" id="{F92CA1CA-4543-E95B-3DDF-02ADDDA691D0}"/>
               </a:ext>
             </a:extLst>
           </p:cNvPr>
@@ -3455,7 +5397,7 @@
           <p:cNvPr id="3" name="内容占位符 2">
             <a:extLst>
               <a:ext uri="{FF2B5EF4-FFF2-40B4-BE49-F238E27FC236}">
-                <a16:creationId xmlns:a16="http://schemas.microsoft.com/office/drawing/2014/main" id="{5813DCAE-1DB8-7080-DC9F-61417033C0DE}"/>
+                <a16:creationId xmlns:a16="http://schemas.microsoft.com/office/drawing/2014/main" id="{878DF6BC-32C8-5C68-97BB-58D672944D9B}"/>
               </a:ext>
             </a:extLst>
           </p:cNvPr>
@@ -3512,7 +5454,7 @@
           <p:cNvPr id="4" name="日期占位符 3">
             <a:extLst>
               <a:ext uri="{FF2B5EF4-FFF2-40B4-BE49-F238E27FC236}">
-                <a16:creationId xmlns:a16="http://schemas.microsoft.com/office/drawing/2014/main" id="{B913B22C-A8AA-2CE6-0BDC-034803867111}"/>
+                <a16:creationId xmlns:a16="http://schemas.microsoft.com/office/drawing/2014/main" id="{0E5ECFA4-3FA8-B428-C323-AD5431EE369E}"/>
               </a:ext>
             </a:extLst>
           </p:cNvPr>
@@ -3528,7 +5470,7 @@
           <a:bodyPr/>
           <a:lstStyle/>
           <a:p>
-            <a:fld id="{7EB75B3C-5007-4530-8716-49195C2E46F5}" type="datetimeFigureOut">
+            <a:fld id="{7015EA8C-A5F6-4D14-9EE3-F54867C5780F}" type="datetimeFigureOut">
               <a:rPr lang="zh-CN" altLang="en-US" smtClean="0"/>
               <a:t>2026/10/13</a:t>
             </a:fld>
@@ -3541,7 +5483,7 @@
           <p:cNvPr id="5" name="页脚占位符 4">
             <a:extLst>
               <a:ext uri="{FF2B5EF4-FFF2-40B4-BE49-F238E27FC236}">
-                <a16:creationId xmlns:a16="http://schemas.microsoft.com/office/drawing/2014/main" id="{D743EECC-369E-2D05-5F16-147FA5F10A62}"/>
+                <a16:creationId xmlns:a16="http://schemas.microsoft.com/office/drawing/2014/main" id="{6BED394A-960F-8F28-AED1-81A48F46E966}"/>
               </a:ext>
             </a:extLst>
           </p:cNvPr>
@@ -3566,7 +5508,7 @@
           <p:cNvPr id="6" name="灯片编号占位符 5">
             <a:extLst>
               <a:ext uri="{FF2B5EF4-FFF2-40B4-BE49-F238E27FC236}">
-                <a16:creationId xmlns:a16="http://schemas.microsoft.com/office/drawing/2014/main" id="{D818581D-C1C7-B166-3B94-0EB9336DD540}"/>
+                <a16:creationId xmlns:a16="http://schemas.microsoft.com/office/drawing/2014/main" id="{C486F848-4C95-C840-5696-92F42094383A}"/>
               </a:ext>
             </a:extLst>
           </p:cNvPr>
@@ -3582,7 +5524,7 @@
           <a:bodyPr/>
           <a:lstStyle/>
           <a:p>
-            <a:fld id="{6A2FB4F2-CD24-4476-8476-8C85252174F8}" type="slidenum">
+            <a:fld id="{62AC4BB8-FA70-4F42-80C8-87D87CE0B4C4}" type="slidenum">
               <a:rPr lang="zh-CN" altLang="en-US" smtClean="0"/>
               <a:t>‹#›</a:t>
             </a:fld>
@@ -3593,7 +5535,7 @@
     </p:spTree>
     <p:extLst>
       <p:ext uri="{BB962C8B-B14F-4D97-AF65-F5344CB8AC3E}">
-        <p14:creationId xmlns:p14="http://schemas.microsoft.com/office/powerpoint/2010/main" val="1281172077"/>
+        <p14:creationId xmlns:p14="http://schemas.microsoft.com/office/powerpoint/2010/main" val="128012343"/>
       </p:ext>
     </p:extLst>
   </p:cSld>
@@ -3625,7 +5567,7 @@
           <p:cNvPr id="2" name="标题 1">
             <a:extLst>
               <a:ext uri="{FF2B5EF4-FFF2-40B4-BE49-F238E27FC236}">
-                <a16:creationId xmlns:a16="http://schemas.microsoft.com/office/drawing/2014/main" id="{A9227A29-6264-235B-9564-1D18B492E0AF}"/>
+                <a16:creationId xmlns:a16="http://schemas.microsoft.com/office/drawing/2014/main" id="{D971C0D5-BA44-90C3-CCD2-206767DB81EC}"/>
               </a:ext>
             </a:extLst>
           </p:cNvPr>
@@ -3662,7 +5604,7 @@
           <p:cNvPr id="3" name="文本占位符 2">
             <a:extLst>
               <a:ext uri="{FF2B5EF4-FFF2-40B4-BE49-F238E27FC236}">
-                <a16:creationId xmlns:a16="http://schemas.microsoft.com/office/drawing/2014/main" id="{30B44FA9-F253-7371-DD6F-E4B341F68CCD}"/>
+                <a16:creationId xmlns:a16="http://schemas.microsoft.com/office/drawing/2014/main" id="{A99F1131-63A3-C349-6631-B0241289C632}"/>
               </a:ext>
             </a:extLst>
           </p:cNvPr>
@@ -3787,7 +5729,7 @@
           <p:cNvPr id="4" name="日期占位符 3">
             <a:extLst>
               <a:ext uri="{FF2B5EF4-FFF2-40B4-BE49-F238E27FC236}">
-                <a16:creationId xmlns:a16="http://schemas.microsoft.com/office/drawing/2014/main" id="{5C25F997-CCC9-C929-84B9-01DD4105828A}"/>
+                <a16:creationId xmlns:a16="http://schemas.microsoft.com/office/drawing/2014/main" id="{8BFA2C0B-6043-59F4-A3EC-7DA8DE60A47F}"/>
               </a:ext>
             </a:extLst>
           </p:cNvPr>
@@ -3803,7 +5745,7 @@
           <a:bodyPr/>
           <a:lstStyle/>
           <a:p>
-            <a:fld id="{7EB75B3C-5007-4530-8716-49195C2E46F5}" type="datetimeFigureOut">
+            <a:fld id="{7015EA8C-A5F6-4D14-9EE3-F54867C5780F}" type="datetimeFigureOut">
               <a:rPr lang="zh-CN" altLang="en-US" smtClean="0"/>
               <a:t>2026/10/13</a:t>
             </a:fld>
@@ -3816,7 +5758,7 @@
           <p:cNvPr id="5" name="页脚占位符 4">
             <a:extLst>
               <a:ext uri="{FF2B5EF4-FFF2-40B4-BE49-F238E27FC236}">
-                <a16:creationId xmlns:a16="http://schemas.microsoft.com/office/drawing/2014/main" id="{E212CD4E-DF75-7677-9130-19F57956DA8E}"/>
+                <a16:creationId xmlns:a16="http://schemas.microsoft.com/office/drawing/2014/main" id="{53E0195B-CA24-28FC-F812-AE7D10E1AEA9}"/>
               </a:ext>
             </a:extLst>
           </p:cNvPr>
@@ -3841,7 +5783,7 @@
           <p:cNvPr id="6" name="灯片编号占位符 5">
             <a:extLst>
               <a:ext uri="{FF2B5EF4-FFF2-40B4-BE49-F238E27FC236}">
-                <a16:creationId xmlns:a16="http://schemas.microsoft.com/office/drawing/2014/main" id="{7612A901-3CC9-F9A0-2D69-1FF8137496F7}"/>
+                <a16:creationId xmlns:a16="http://schemas.microsoft.com/office/drawing/2014/main" id="{D9B22CAC-D804-4BCA-0FFD-D02DB50724C9}"/>
               </a:ext>
             </a:extLst>
           </p:cNvPr>
@@ -3857,7 +5799,7 @@
           <a:bodyPr/>
           <a:lstStyle/>
           <a:p>
-            <a:fld id="{6A2FB4F2-CD24-4476-8476-8C85252174F8}" type="slidenum">
+            <a:fld id="{62AC4BB8-FA70-4F42-80C8-87D87CE0B4C4}" type="slidenum">
               <a:rPr lang="zh-CN" altLang="en-US" smtClean="0"/>
               <a:t>‹#›</a:t>
             </a:fld>
@@ -3868,7 +5810,7 @@
     </p:spTree>
     <p:extLst>
       <p:ext uri="{BB962C8B-B14F-4D97-AF65-F5344CB8AC3E}">
-        <p14:creationId xmlns:p14="http://schemas.microsoft.com/office/powerpoint/2010/main" val="1956814641"/>
+        <p14:creationId xmlns:p14="http://schemas.microsoft.com/office/powerpoint/2010/main" val="3053788423"/>
       </p:ext>
     </p:extLst>
   </p:cSld>
@@ -3900,7 +5842,7 @@
           <p:cNvPr id="2" name="标题 1">
             <a:extLst>
               <a:ext uri="{FF2B5EF4-FFF2-40B4-BE49-F238E27FC236}">
-                <a16:creationId xmlns:a16="http://schemas.microsoft.com/office/drawing/2014/main" id="{F1CD7649-E42B-5764-1D34-F5D79E37D4A2}"/>
+                <a16:creationId xmlns:a16="http://schemas.microsoft.com/office/drawing/2014/main" id="{4A1FE42D-49B1-293F-345F-5FECD4430F33}"/>
               </a:ext>
             </a:extLst>
           </p:cNvPr>
@@ -3928,7 +5870,7 @@
           <p:cNvPr id="3" name="内容占位符 2">
             <a:extLst>
               <a:ext uri="{FF2B5EF4-FFF2-40B4-BE49-F238E27FC236}">
-                <a16:creationId xmlns:a16="http://schemas.microsoft.com/office/drawing/2014/main" id="{A49ADE1D-CEFF-0044-D1DB-69F1790D2E14}"/>
+                <a16:creationId xmlns:a16="http://schemas.microsoft.com/office/drawing/2014/main" id="{C074E646-706A-087C-8796-0D5FDB15BE03}"/>
               </a:ext>
             </a:extLst>
           </p:cNvPr>
@@ -3990,7 +5932,7 @@
           <p:cNvPr id="4" name="内容占位符 3">
             <a:extLst>
               <a:ext uri="{FF2B5EF4-FFF2-40B4-BE49-F238E27FC236}">
-                <a16:creationId xmlns:a16="http://schemas.microsoft.com/office/drawing/2014/main" id="{7874C2CF-C88E-1B8B-C1F7-C9A583996609}"/>
+                <a16:creationId xmlns:a16="http://schemas.microsoft.com/office/drawing/2014/main" id="{0D90B847-7A12-0810-4640-8A13804C7C39}"/>
               </a:ext>
             </a:extLst>
           </p:cNvPr>
@@ -4052,7 +5994,7 @@
           <p:cNvPr id="5" name="日期占位符 4">
             <a:extLst>
               <a:ext uri="{FF2B5EF4-FFF2-40B4-BE49-F238E27FC236}">
-                <a16:creationId xmlns:a16="http://schemas.microsoft.com/office/drawing/2014/main" id="{8ED006A7-C3A5-90F5-26EE-C20AE9B22831}"/>
+                <a16:creationId xmlns:a16="http://schemas.microsoft.com/office/drawing/2014/main" id="{10F8B564-AC9F-45AF-27D2-9AB21179AB48}"/>
               </a:ext>
             </a:extLst>
           </p:cNvPr>
@@ -4068,7 +6010,7 @@
           <a:bodyPr/>
           <a:lstStyle/>
           <a:p>
-            <a:fld id="{7EB75B3C-5007-4530-8716-49195C2E46F5}" type="datetimeFigureOut">
+            <a:fld id="{7015EA8C-A5F6-4D14-9EE3-F54867C5780F}" type="datetimeFigureOut">
               <a:rPr lang="zh-CN" altLang="en-US" smtClean="0"/>
               <a:t>2026/10/13</a:t>
             </a:fld>
@@ -4081,7 +6023,7 @@
           <p:cNvPr id="6" name="页脚占位符 5">
             <a:extLst>
               <a:ext uri="{FF2B5EF4-FFF2-40B4-BE49-F238E27FC236}">
-                <a16:creationId xmlns:a16="http://schemas.microsoft.com/office/drawing/2014/main" id="{BB83E788-AF66-F13B-3039-1F7C2FB4A15F}"/>
+                <a16:creationId xmlns:a16="http://schemas.microsoft.com/office/drawing/2014/main" id="{E26B8FE8-8CED-EC10-6188-F4EC26EBB2B1}"/>
               </a:ext>
             </a:extLst>
           </p:cNvPr>
@@ -4106,7 +6048,7 @@
           <p:cNvPr id="7" name="灯片编号占位符 6">
             <a:extLst>
               <a:ext uri="{FF2B5EF4-FFF2-40B4-BE49-F238E27FC236}">
-                <a16:creationId xmlns:a16="http://schemas.microsoft.com/office/drawing/2014/main" id="{B1B6B77C-910B-2641-EA5F-FC921601040F}"/>
+                <a16:creationId xmlns:a16="http://schemas.microsoft.com/office/drawing/2014/main" id="{99E884F1-CD97-B8AF-251E-40A7C2FE6B58}"/>
               </a:ext>
             </a:extLst>
           </p:cNvPr>
@@ -4122,7 +6064,7 @@
           <a:bodyPr/>
           <a:lstStyle/>
           <a:p>
-            <a:fld id="{6A2FB4F2-CD24-4476-8476-8C85252174F8}" type="slidenum">
+            <a:fld id="{62AC4BB8-FA70-4F42-80C8-87D87CE0B4C4}" type="slidenum">
               <a:rPr lang="zh-CN" altLang="en-US" smtClean="0"/>
               <a:t>‹#›</a:t>
             </a:fld>
@@ -4133,7 +6075,7 @@
     </p:spTree>
     <p:extLst>
       <p:ext uri="{BB962C8B-B14F-4D97-AF65-F5344CB8AC3E}">
-        <p14:creationId xmlns:p14="http://schemas.microsoft.com/office/powerpoint/2010/main" val="3898064327"/>
+        <p14:creationId xmlns:p14="http://schemas.microsoft.com/office/powerpoint/2010/main" val="1071714441"/>
       </p:ext>
     </p:extLst>
   </p:cSld>
@@ -4165,7 +6107,7 @@
           <p:cNvPr id="2" name="标题 1">
             <a:extLst>
               <a:ext uri="{FF2B5EF4-FFF2-40B4-BE49-F238E27FC236}">
-                <a16:creationId xmlns:a16="http://schemas.microsoft.com/office/drawing/2014/main" id="{8C9A5622-26F7-BC36-B68F-6A8EFA6BA73C}"/>
+                <a16:creationId xmlns:a16="http://schemas.microsoft.com/office/drawing/2014/main" id="{DDAFBE97-007E-B490-189F-97A111DA4A28}"/>
               </a:ext>
             </a:extLst>
           </p:cNvPr>
@@ -4198,7 +6140,7 @@
           <p:cNvPr id="3" name="文本占位符 2">
             <a:extLst>
               <a:ext uri="{FF2B5EF4-FFF2-40B4-BE49-F238E27FC236}">
-                <a16:creationId xmlns:a16="http://schemas.microsoft.com/office/drawing/2014/main" id="{CDC009FC-61F3-A2DD-D2EF-83161DB48C8D}"/>
+                <a16:creationId xmlns:a16="http://schemas.microsoft.com/office/drawing/2014/main" id="{E01AFF30-AD1A-E2AB-E09D-36700E9CC37C}"/>
               </a:ext>
             </a:extLst>
           </p:cNvPr>
@@ -4269,7 +6211,7 @@
           <p:cNvPr id="4" name="内容占位符 3">
             <a:extLst>
               <a:ext uri="{FF2B5EF4-FFF2-40B4-BE49-F238E27FC236}">
-                <a16:creationId xmlns:a16="http://schemas.microsoft.com/office/drawing/2014/main" id="{5FFBB0AE-FAB9-5EA9-2EBE-658C26CC573A}"/>
+                <a16:creationId xmlns:a16="http://schemas.microsoft.com/office/drawing/2014/main" id="{458B49B7-158B-2760-F214-F6FF13B68B7E}"/>
               </a:ext>
             </a:extLst>
           </p:cNvPr>
@@ -4331,7 +6273,7 @@
           <p:cNvPr id="5" name="文本占位符 4">
             <a:extLst>
               <a:ext uri="{FF2B5EF4-FFF2-40B4-BE49-F238E27FC236}">
-                <a16:creationId xmlns:a16="http://schemas.microsoft.com/office/drawing/2014/main" id="{6C397906-9C4A-AF35-E97E-FD8F3DA16951}"/>
+                <a16:creationId xmlns:a16="http://schemas.microsoft.com/office/drawing/2014/main" id="{7E995E80-5095-1E16-736F-4BF3654BF77C}"/>
               </a:ext>
             </a:extLst>
           </p:cNvPr>
@@ -4402,7 +6344,7 @@
           <p:cNvPr id="6" name="内容占位符 5">
             <a:extLst>
               <a:ext uri="{FF2B5EF4-FFF2-40B4-BE49-F238E27FC236}">
-                <a16:creationId xmlns:a16="http://schemas.microsoft.com/office/drawing/2014/main" id="{2287B500-6EA9-8229-C493-141CA721957D}"/>
+                <a16:creationId xmlns:a16="http://schemas.microsoft.com/office/drawing/2014/main" id="{F77FECB2-2198-F72E-4416-E95C6CFFC330}"/>
               </a:ext>
             </a:extLst>
           </p:cNvPr>
@@ -4464,7 +6406,7 @@
           <p:cNvPr id="7" name="日期占位符 6">
             <a:extLst>
               <a:ext uri="{FF2B5EF4-FFF2-40B4-BE49-F238E27FC236}">
-                <a16:creationId xmlns:a16="http://schemas.microsoft.com/office/drawing/2014/main" id="{6E2C8B57-A6A9-1FBA-BADE-91A095F748C0}"/>
+                <a16:creationId xmlns:a16="http://schemas.microsoft.com/office/drawing/2014/main" id="{55A5AAE5-1637-944B-80EA-BFC877FF7834}"/>
               </a:ext>
             </a:extLst>
           </p:cNvPr>
@@ -4480,7 +6422,7 @@
           <a:bodyPr/>
           <a:lstStyle/>
           <a:p>
-            <a:fld id="{7EB75B3C-5007-4530-8716-49195C2E46F5}" type="datetimeFigureOut">
+            <a:fld id="{7015EA8C-A5F6-4D14-9EE3-F54867C5780F}" type="datetimeFigureOut">
               <a:rPr lang="zh-CN" altLang="en-US" smtClean="0"/>
               <a:t>2026/10/13</a:t>
             </a:fld>
@@ -4493,7 +6435,7 @@
           <p:cNvPr id="8" name="页脚占位符 7">
             <a:extLst>
               <a:ext uri="{FF2B5EF4-FFF2-40B4-BE49-F238E27FC236}">
-                <a16:creationId xmlns:a16="http://schemas.microsoft.com/office/drawing/2014/main" id="{A74F3E3A-5856-2C46-36D0-93E2CFCD9921}"/>
+                <a16:creationId xmlns:a16="http://schemas.microsoft.com/office/drawing/2014/main" id="{0BBE6674-EEBF-8F12-7940-7542C8C7E02C}"/>
               </a:ext>
             </a:extLst>
           </p:cNvPr>
@@ -4518,7 +6460,7 @@
           <p:cNvPr id="9" name="灯片编号占位符 8">
             <a:extLst>
               <a:ext uri="{FF2B5EF4-FFF2-40B4-BE49-F238E27FC236}">
-                <a16:creationId xmlns:a16="http://schemas.microsoft.com/office/drawing/2014/main" id="{B11AB307-86EE-5704-307D-8E96C45C3E04}"/>
+                <a16:creationId xmlns:a16="http://schemas.microsoft.com/office/drawing/2014/main" id="{84178761-EA45-27AD-3FE7-3CC7CE951681}"/>
               </a:ext>
             </a:extLst>
           </p:cNvPr>
@@ -4534,7 +6476,7 @@
           <a:bodyPr/>
           <a:lstStyle/>
           <a:p>
-            <a:fld id="{6A2FB4F2-CD24-4476-8476-8C85252174F8}" type="slidenum">
+            <a:fld id="{62AC4BB8-FA70-4F42-80C8-87D87CE0B4C4}" type="slidenum">
               <a:rPr lang="zh-CN" altLang="en-US" smtClean="0"/>
               <a:t>‹#›</a:t>
             </a:fld>
@@ -4545,7 +6487,7 @@
     </p:spTree>
     <p:extLst>
       <p:ext uri="{BB962C8B-B14F-4D97-AF65-F5344CB8AC3E}">
-        <p14:creationId xmlns:p14="http://schemas.microsoft.com/office/powerpoint/2010/main" val="993190920"/>
+        <p14:creationId xmlns:p14="http://schemas.microsoft.com/office/powerpoint/2010/main" val="2506605402"/>
       </p:ext>
     </p:extLst>
   </p:cSld>
@@ -4577,7 +6519,7 @@
           <p:cNvPr id="2" name="标题 1">
             <a:extLst>
               <a:ext uri="{FF2B5EF4-FFF2-40B4-BE49-F238E27FC236}">
-                <a16:creationId xmlns:a16="http://schemas.microsoft.com/office/drawing/2014/main" id="{55C098E7-1327-B271-2FD5-1AB120A67632}"/>
+                <a16:creationId xmlns:a16="http://schemas.microsoft.com/office/drawing/2014/main" id="{D2DCD17B-82F7-CC0C-91C7-96F4A6418DA6}"/>
               </a:ext>
             </a:extLst>
           </p:cNvPr>
@@ -4605,7 +6547,7 @@
           <p:cNvPr id="3" name="日期占位符 2">
             <a:extLst>
               <a:ext uri="{FF2B5EF4-FFF2-40B4-BE49-F238E27FC236}">
-                <a16:creationId xmlns:a16="http://schemas.microsoft.com/office/drawing/2014/main" id="{83C90282-04E4-F433-5112-21FFCAF1861B}"/>
+                <a16:creationId xmlns:a16="http://schemas.microsoft.com/office/drawing/2014/main" id="{ED7B33DB-7308-E77B-B380-41CC0389E192}"/>
               </a:ext>
             </a:extLst>
           </p:cNvPr>
@@ -4621,7 +6563,7 @@
           <a:bodyPr/>
           <a:lstStyle/>
           <a:p>
-            <a:fld id="{7EB75B3C-5007-4530-8716-49195C2E46F5}" type="datetimeFigureOut">
+            <a:fld id="{7015EA8C-A5F6-4D14-9EE3-F54867C5780F}" type="datetimeFigureOut">
               <a:rPr lang="zh-CN" altLang="en-US" smtClean="0"/>
               <a:t>2026/10/13</a:t>
             </a:fld>
@@ -4634,7 +6576,7 @@
           <p:cNvPr id="4" name="页脚占位符 3">
             <a:extLst>
               <a:ext uri="{FF2B5EF4-FFF2-40B4-BE49-F238E27FC236}">
-                <a16:creationId xmlns:a16="http://schemas.microsoft.com/office/drawing/2014/main" id="{B1874C7D-ABC3-DF4C-AC56-4E64E3CEAFE0}"/>
+                <a16:creationId xmlns:a16="http://schemas.microsoft.com/office/drawing/2014/main" id="{CB4D026A-56BE-86E9-5B95-2299BBD49C9F}"/>
               </a:ext>
             </a:extLst>
           </p:cNvPr>
@@ -4659,7 +6601,7 @@
           <p:cNvPr id="5" name="灯片编号占位符 4">
             <a:extLst>
               <a:ext uri="{FF2B5EF4-FFF2-40B4-BE49-F238E27FC236}">
-                <a16:creationId xmlns:a16="http://schemas.microsoft.com/office/drawing/2014/main" id="{97D609B4-2E20-11EA-5D7F-7E776C1E404A}"/>
+                <a16:creationId xmlns:a16="http://schemas.microsoft.com/office/drawing/2014/main" id="{8430B4D9-DCF5-17B4-DBF0-CE2E7DF07B78}"/>
               </a:ext>
             </a:extLst>
           </p:cNvPr>
@@ -4675,7 +6617,7 @@
           <a:bodyPr/>
           <a:lstStyle/>
           <a:p>
-            <a:fld id="{6A2FB4F2-CD24-4476-8476-8C85252174F8}" type="slidenum">
+            <a:fld id="{62AC4BB8-FA70-4F42-80C8-87D87CE0B4C4}" type="slidenum">
               <a:rPr lang="zh-CN" altLang="en-US" smtClean="0"/>
               <a:t>‹#›</a:t>
             </a:fld>
@@ -4686,7 +6628,7 @@
     </p:spTree>
     <p:extLst>
       <p:ext uri="{BB962C8B-B14F-4D97-AF65-F5344CB8AC3E}">
-        <p14:creationId xmlns:p14="http://schemas.microsoft.com/office/powerpoint/2010/main" val="3231246626"/>
+        <p14:creationId xmlns:p14="http://schemas.microsoft.com/office/powerpoint/2010/main" val="947851557"/>
       </p:ext>
     </p:extLst>
   </p:cSld>
@@ -4718,7 +6660,7 @@
           <p:cNvPr id="2" name="日期占位符 1">
             <a:extLst>
               <a:ext uri="{FF2B5EF4-FFF2-40B4-BE49-F238E27FC236}">
-                <a16:creationId xmlns:a16="http://schemas.microsoft.com/office/drawing/2014/main" id="{601F61EE-8408-EAB5-7C4D-589A2C18146C}"/>
+                <a16:creationId xmlns:a16="http://schemas.microsoft.com/office/drawing/2014/main" id="{452F5D62-8331-AAE2-FFDD-E136A757003A}"/>
               </a:ext>
             </a:extLst>
           </p:cNvPr>
@@ -4734,7 +6676,7 @@
           <a:bodyPr/>
           <a:lstStyle/>
           <a:p>
-            <a:fld id="{7EB75B3C-5007-4530-8716-49195C2E46F5}" type="datetimeFigureOut">
+            <a:fld id="{7015EA8C-A5F6-4D14-9EE3-F54867C5780F}" type="datetimeFigureOut">
               <a:rPr lang="zh-CN" altLang="en-US" smtClean="0"/>
               <a:t>2026/10/13</a:t>
             </a:fld>
@@ -4747,7 +6689,7 @@
           <p:cNvPr id="3" name="页脚占位符 2">
             <a:extLst>
               <a:ext uri="{FF2B5EF4-FFF2-40B4-BE49-F238E27FC236}">
-                <a16:creationId xmlns:a16="http://schemas.microsoft.com/office/drawing/2014/main" id="{6CD13EBC-5277-1065-940F-6BE9F9AD6B33}"/>
+                <a16:creationId xmlns:a16="http://schemas.microsoft.com/office/drawing/2014/main" id="{49F56A16-1D42-652F-2E2F-77C868A29253}"/>
               </a:ext>
             </a:extLst>
           </p:cNvPr>
@@ -4772,7 +6714,7 @@
           <p:cNvPr id="4" name="灯片编号占位符 3">
             <a:extLst>
               <a:ext uri="{FF2B5EF4-FFF2-40B4-BE49-F238E27FC236}">
-                <a16:creationId xmlns:a16="http://schemas.microsoft.com/office/drawing/2014/main" id="{D361C4C3-9559-A949-291C-205A03A9B757}"/>
+                <a16:creationId xmlns:a16="http://schemas.microsoft.com/office/drawing/2014/main" id="{692BA2F7-24CE-9DD6-AABD-BCC8E844E61C}"/>
               </a:ext>
             </a:extLst>
           </p:cNvPr>
@@ -4788,7 +6730,7 @@
           <a:bodyPr/>
           <a:lstStyle/>
           <a:p>
-            <a:fld id="{6A2FB4F2-CD24-4476-8476-8C85252174F8}" type="slidenum">
+            <a:fld id="{62AC4BB8-FA70-4F42-80C8-87D87CE0B4C4}" type="slidenum">
               <a:rPr lang="zh-CN" altLang="en-US" smtClean="0"/>
               <a:t>‹#›</a:t>
             </a:fld>
@@ -4799,7 +6741,7 @@
     </p:spTree>
     <p:extLst>
       <p:ext uri="{BB962C8B-B14F-4D97-AF65-F5344CB8AC3E}">
-        <p14:creationId xmlns:p14="http://schemas.microsoft.com/office/powerpoint/2010/main" val="4137075312"/>
+        <p14:creationId xmlns:p14="http://schemas.microsoft.com/office/powerpoint/2010/main" val="3505705063"/>
       </p:ext>
     </p:extLst>
   </p:cSld>
@@ -4831,7 +6773,7 @@
           <p:cNvPr id="2" name="标题 1">
             <a:extLst>
               <a:ext uri="{FF2B5EF4-FFF2-40B4-BE49-F238E27FC236}">
-                <a16:creationId xmlns:a16="http://schemas.microsoft.com/office/drawing/2014/main" id="{2BA37EC4-4E8A-5B46-F1D1-622DD4CD89FE}"/>
+                <a16:creationId xmlns:a16="http://schemas.microsoft.com/office/drawing/2014/main" id="{B3959111-463E-5218-208E-530F22A8A549}"/>
               </a:ext>
             </a:extLst>
           </p:cNvPr>
@@ -4868,7 +6810,7 @@
           <p:cNvPr id="3" name="内容占位符 2">
             <a:extLst>
               <a:ext uri="{FF2B5EF4-FFF2-40B4-BE49-F238E27FC236}">
-                <a16:creationId xmlns:a16="http://schemas.microsoft.com/office/drawing/2014/main" id="{D1BC896D-04D0-218F-4DFB-FAA8F24CE8C0}"/>
+                <a16:creationId xmlns:a16="http://schemas.microsoft.com/office/drawing/2014/main" id="{A5F0DEE8-9855-8CB2-2262-9FC3F4AB0891}"/>
               </a:ext>
             </a:extLst>
           </p:cNvPr>
@@ -4958,7 +6900,7 @@
           <p:cNvPr id="4" name="文本占位符 3">
             <a:extLst>
               <a:ext uri="{FF2B5EF4-FFF2-40B4-BE49-F238E27FC236}">
-                <a16:creationId xmlns:a16="http://schemas.microsoft.com/office/drawing/2014/main" id="{ABE259D8-F79A-D306-C33A-F49885FBF6C0}"/>
+                <a16:creationId xmlns:a16="http://schemas.microsoft.com/office/drawing/2014/main" id="{BE0096FD-4829-126D-AD78-7D5B7AE94659}"/>
               </a:ext>
             </a:extLst>
           </p:cNvPr>
@@ -5029,7 +6971,7 @@
           <p:cNvPr id="5" name="日期占位符 4">
             <a:extLst>
               <a:ext uri="{FF2B5EF4-FFF2-40B4-BE49-F238E27FC236}">
-                <a16:creationId xmlns:a16="http://schemas.microsoft.com/office/drawing/2014/main" id="{4CA83A23-CF2C-86D9-A7AE-222C3020119C}"/>
+                <a16:creationId xmlns:a16="http://schemas.microsoft.com/office/drawing/2014/main" id="{034F8F09-5353-785A-DADD-E28E09E7FA51}"/>
               </a:ext>
             </a:extLst>
           </p:cNvPr>
@@ -5045,7 +6987,7 @@
           <a:bodyPr/>
           <a:lstStyle/>
           <a:p>
-            <a:fld id="{7EB75B3C-5007-4530-8716-49195C2E46F5}" type="datetimeFigureOut">
+            <a:fld id="{7015EA8C-A5F6-4D14-9EE3-F54867C5780F}" type="datetimeFigureOut">
               <a:rPr lang="zh-CN" altLang="en-US" smtClean="0"/>
               <a:t>2026/10/13</a:t>
             </a:fld>
@@ -5058,7 +7000,7 @@
           <p:cNvPr id="6" name="页脚占位符 5">
             <a:extLst>
               <a:ext uri="{FF2B5EF4-FFF2-40B4-BE49-F238E27FC236}">
-                <a16:creationId xmlns:a16="http://schemas.microsoft.com/office/drawing/2014/main" id="{9DE70161-76B7-4296-3A27-11EC0D2CD9EA}"/>
+                <a16:creationId xmlns:a16="http://schemas.microsoft.com/office/drawing/2014/main" id="{813C4AD1-E44D-3635-851B-A10F16AC620A}"/>
               </a:ext>
             </a:extLst>
           </p:cNvPr>
@@ -5083,7 +7025,7 @@
           <p:cNvPr id="7" name="灯片编号占位符 6">
             <a:extLst>
               <a:ext uri="{FF2B5EF4-FFF2-40B4-BE49-F238E27FC236}">
-                <a16:creationId xmlns:a16="http://schemas.microsoft.com/office/drawing/2014/main" id="{30C2D642-89B3-BAD2-25A6-3CE8941DD5EC}"/>
+                <a16:creationId xmlns:a16="http://schemas.microsoft.com/office/drawing/2014/main" id="{3A702C80-429E-5082-2B79-8AB3CDA678DF}"/>
               </a:ext>
             </a:extLst>
           </p:cNvPr>
@@ -5099,7 +7041,7 @@
           <a:bodyPr/>
           <a:lstStyle/>
           <a:p>
-            <a:fld id="{6A2FB4F2-CD24-4476-8476-8C85252174F8}" type="slidenum">
+            <a:fld id="{62AC4BB8-FA70-4F42-80C8-87D87CE0B4C4}" type="slidenum">
               <a:rPr lang="zh-CN" altLang="en-US" smtClean="0"/>
               <a:t>‹#›</a:t>
             </a:fld>
@@ -5110,7 +7052,7 @@
     </p:spTree>
     <p:extLst>
       <p:ext uri="{BB962C8B-B14F-4D97-AF65-F5344CB8AC3E}">
-        <p14:creationId xmlns:p14="http://schemas.microsoft.com/office/powerpoint/2010/main" val="2700108356"/>
+        <p14:creationId xmlns:p14="http://schemas.microsoft.com/office/powerpoint/2010/main" val="2573431447"/>
       </p:ext>
     </p:extLst>
   </p:cSld>
@@ -5142,7 +7084,7 @@
           <p:cNvPr id="2" name="标题 1">
             <a:extLst>
               <a:ext uri="{FF2B5EF4-FFF2-40B4-BE49-F238E27FC236}">
-                <a16:creationId xmlns:a16="http://schemas.microsoft.com/office/drawing/2014/main" id="{359913FE-161F-69C6-BE85-93A0755F132F}"/>
+                <a16:creationId xmlns:a16="http://schemas.microsoft.com/office/drawing/2014/main" id="{25DE9CFB-86BA-99C7-4517-B6EDF9C04B51}"/>
               </a:ext>
             </a:extLst>
           </p:cNvPr>
@@ -5179,7 +7121,7 @@
           <p:cNvPr id="3" name="图片占位符 2">
             <a:extLst>
               <a:ext uri="{FF2B5EF4-FFF2-40B4-BE49-F238E27FC236}">
-                <a16:creationId xmlns:a16="http://schemas.microsoft.com/office/drawing/2014/main" id="{41C3A508-4F8B-4C07-F16F-0C2FA5794F74}"/>
+                <a16:creationId xmlns:a16="http://schemas.microsoft.com/office/drawing/2014/main" id="{D48F4908-BB07-4D58-8541-49CC7C8A5166}"/>
               </a:ext>
             </a:extLst>
           </p:cNvPr>
@@ -5246,7 +7188,7 @@
           <p:cNvPr id="4" name="文本占位符 3">
             <a:extLst>
               <a:ext uri="{FF2B5EF4-FFF2-40B4-BE49-F238E27FC236}">
-                <a16:creationId xmlns:a16="http://schemas.microsoft.com/office/drawing/2014/main" id="{CF58DA0C-FEC4-F597-693E-9E5365BD0A82}"/>
+                <a16:creationId xmlns:a16="http://schemas.microsoft.com/office/drawing/2014/main" id="{8121A009-5FDC-2122-E03C-AFA72C5C43A5}"/>
               </a:ext>
             </a:extLst>
           </p:cNvPr>
@@ -5317,7 +7259,7 @@
           <p:cNvPr id="5" name="日期占位符 4">
             <a:extLst>
               <a:ext uri="{FF2B5EF4-FFF2-40B4-BE49-F238E27FC236}">
-                <a16:creationId xmlns:a16="http://schemas.microsoft.com/office/drawing/2014/main" id="{7B1D1A53-0FC4-2286-79B0-8824FE8F9527}"/>
+                <a16:creationId xmlns:a16="http://schemas.microsoft.com/office/drawing/2014/main" id="{0C7ADB8F-EAC2-7A35-65B5-A6F9D5DC6988}"/>
               </a:ext>
             </a:extLst>
           </p:cNvPr>
@@ -5333,7 +7275,7 @@
           <a:bodyPr/>
           <a:lstStyle/>
           <a:p>
-            <a:fld id="{7EB75B3C-5007-4530-8716-49195C2E46F5}" type="datetimeFigureOut">
+            <a:fld id="{7015EA8C-A5F6-4D14-9EE3-F54867C5780F}" type="datetimeFigureOut">
               <a:rPr lang="zh-CN" altLang="en-US" smtClean="0"/>
               <a:t>2026/10/13</a:t>
             </a:fld>
@@ -5346,7 +7288,7 @@
           <p:cNvPr id="6" name="页脚占位符 5">
             <a:extLst>
               <a:ext uri="{FF2B5EF4-FFF2-40B4-BE49-F238E27FC236}">
-                <a16:creationId xmlns:a16="http://schemas.microsoft.com/office/drawing/2014/main" id="{C53FF7CB-83AB-1739-8F33-6F92720EA6B0}"/>
+                <a16:creationId xmlns:a16="http://schemas.microsoft.com/office/drawing/2014/main" id="{C85723DF-89EF-E7FF-20D0-F97FFF6F125D}"/>
               </a:ext>
             </a:extLst>
           </p:cNvPr>
@@ -5371,7 +7313,7 @@
           <p:cNvPr id="7" name="灯片编号占位符 6">
             <a:extLst>
               <a:ext uri="{FF2B5EF4-FFF2-40B4-BE49-F238E27FC236}">
-                <a16:creationId xmlns:a16="http://schemas.microsoft.com/office/drawing/2014/main" id="{5F8E4663-6D19-3097-06DD-80E2C85C12CC}"/>
+                <a16:creationId xmlns:a16="http://schemas.microsoft.com/office/drawing/2014/main" id="{0690B4BD-D386-2B30-D6CC-4A18981DED8F}"/>
               </a:ext>
             </a:extLst>
           </p:cNvPr>
@@ -5387,7 +7329,7 @@
           <a:bodyPr/>
           <a:lstStyle/>
           <a:p>
-            <a:fld id="{6A2FB4F2-CD24-4476-8476-8C85252174F8}" type="slidenum">
+            <a:fld id="{62AC4BB8-FA70-4F42-80C8-87D87CE0B4C4}" type="slidenum">
               <a:rPr lang="zh-CN" altLang="en-US" smtClean="0"/>
               <a:t>‹#›</a:t>
             </a:fld>
@@ -5398,7 +7340,7 @@
     </p:spTree>
     <p:extLst>
       <p:ext uri="{BB962C8B-B14F-4D97-AF65-F5344CB8AC3E}">
-        <p14:creationId xmlns:p14="http://schemas.microsoft.com/office/powerpoint/2010/main" val="2575289998"/>
+        <p14:creationId xmlns:p14="http://schemas.microsoft.com/office/powerpoint/2010/main" val="287640043"/>
       </p:ext>
     </p:extLst>
   </p:cSld>
@@ -5435,7 +7377,7 @@
           <p:cNvPr id="2" name="标题占位符 1">
             <a:extLst>
               <a:ext uri="{FF2B5EF4-FFF2-40B4-BE49-F238E27FC236}">
-                <a16:creationId xmlns:a16="http://schemas.microsoft.com/office/drawing/2014/main" id="{05DC14DA-01D5-E1D1-31CF-A324BC078AEC}"/>
+                <a16:creationId xmlns:a16="http://schemas.microsoft.com/office/drawing/2014/main" id="{8F954367-6794-ADF4-D090-0D6E4DC928B7}"/>
               </a:ext>
             </a:extLst>
           </p:cNvPr>
@@ -5473,7 +7415,7 @@
           <p:cNvPr id="3" name="文本占位符 2">
             <a:extLst>
               <a:ext uri="{FF2B5EF4-FFF2-40B4-BE49-F238E27FC236}">
-                <a16:creationId xmlns:a16="http://schemas.microsoft.com/office/drawing/2014/main" id="{D3DFAAC2-4C82-F62E-5539-A7940A46458C}"/>
+                <a16:creationId xmlns:a16="http://schemas.microsoft.com/office/drawing/2014/main" id="{6F6DFC7B-77EA-4721-90D2-2A638B7ECF85}"/>
               </a:ext>
             </a:extLst>
           </p:cNvPr>
@@ -5540,7 +7482,7 @@
           <p:cNvPr id="4" name="日期占位符 3">
             <a:extLst>
               <a:ext uri="{FF2B5EF4-FFF2-40B4-BE49-F238E27FC236}">
-                <a16:creationId xmlns:a16="http://schemas.microsoft.com/office/drawing/2014/main" id="{99CB5E46-ACAA-EE52-E2C6-7450B128E97A}"/>
+                <a16:creationId xmlns:a16="http://schemas.microsoft.com/office/drawing/2014/main" id="{FF174974-AD03-ABCC-077C-55C93222B8EF}"/>
               </a:ext>
             </a:extLst>
           </p:cNvPr>
@@ -5574,7 +7516,7 @@
             </a:lvl1pPr>
           </a:lstStyle>
           <a:p>
-            <a:fld id="{7EB75B3C-5007-4530-8716-49195C2E46F5}" type="datetimeFigureOut">
+            <a:fld id="{7015EA8C-A5F6-4D14-9EE3-F54867C5780F}" type="datetimeFigureOut">
               <a:rPr lang="zh-CN" altLang="en-US" smtClean="0"/>
               <a:t>2026/10/13</a:t>
             </a:fld>
@@ -5587,7 +7529,7 @@
           <p:cNvPr id="5" name="页脚占位符 4">
             <a:extLst>
               <a:ext uri="{FF2B5EF4-FFF2-40B4-BE49-F238E27FC236}">
-                <a16:creationId xmlns:a16="http://schemas.microsoft.com/office/drawing/2014/main" id="{B774361E-A1B4-91BB-A37E-23153762FC3C}"/>
+                <a16:creationId xmlns:a16="http://schemas.microsoft.com/office/drawing/2014/main" id="{2194642C-D7DE-9ED4-F3FD-900D8BB5C4B9}"/>
               </a:ext>
             </a:extLst>
           </p:cNvPr>
@@ -5630,7 +7572,7 @@
           <p:cNvPr id="6" name="灯片编号占位符 5">
             <a:extLst>
               <a:ext uri="{FF2B5EF4-FFF2-40B4-BE49-F238E27FC236}">
-                <a16:creationId xmlns:a16="http://schemas.microsoft.com/office/drawing/2014/main" id="{4B93BF3E-32A7-13DA-7868-4734C062051B}"/>
+                <a16:creationId xmlns:a16="http://schemas.microsoft.com/office/drawing/2014/main" id="{29A17B1F-8DEB-2A71-D717-DDA0E72F6B65}"/>
               </a:ext>
             </a:extLst>
           </p:cNvPr>
@@ -5664,7 +7606,7 @@
             </a:lvl1pPr>
           </a:lstStyle>
           <a:p>
-            <a:fld id="{6A2FB4F2-CD24-4476-8476-8C85252174F8}" type="slidenum">
+            <a:fld id="{62AC4BB8-FA70-4F42-80C8-87D87CE0B4C4}" type="slidenum">
               <a:rPr lang="zh-CN" altLang="en-US" smtClean="0"/>
               <a:t>‹#›</a:t>
             </a:fld>
@@ -5675,7 +7617,7 @@
     </p:spTree>
     <p:extLst>
       <p:ext uri="{BB962C8B-B14F-4D97-AF65-F5344CB8AC3E}">
-        <p14:creationId xmlns:p14="http://schemas.microsoft.com/office/powerpoint/2010/main" val="477839693"/>
+        <p14:creationId xmlns:p14="http://schemas.microsoft.com/office/powerpoint/2010/main" val="2736167211"/>
       </p:ext>
     </p:extLst>
   </p:cSld>
@@ -5998,7 +7940,7 @@
           <p:cNvPr id="2" name="图示 1">
             <a:extLst>
               <a:ext uri="{FF2B5EF4-FFF2-40B4-BE49-F238E27FC236}">
-                <a16:creationId xmlns:a16="http://schemas.microsoft.com/office/drawing/2014/main" id="{4E4B3BE7-EA7D-C8B3-1A79-124C373800D8}"/>
+                <a16:creationId xmlns:a16="http://schemas.microsoft.com/office/drawing/2014/main" id="{4D043534-DA81-46E4-99BA-7744879F1172}"/>
               </a:ext>
             </a:extLst>
           </p:cNvPr>
@@ -6006,7 +7948,7 @@
           <p:nvPr>
             <p:extLst>
               <p:ext uri="{D42A27DB-BD31-4B8C-83A1-F6EECF244321}">
-                <p14:modId xmlns:p14="http://schemas.microsoft.com/office/powerpoint/2010/main" val="74663579"/>
+                <p14:modId xmlns:p14="http://schemas.microsoft.com/office/powerpoint/2010/main" val="2190499267"/>
               </p:ext>
             </p:extLst>
           </p:nvPr>
@@ -6024,7 +7966,7 @@
     </p:spTree>
     <p:extLst>
       <p:ext uri="{BB962C8B-B14F-4D97-AF65-F5344CB8AC3E}">
-        <p14:creationId xmlns:p14="http://schemas.microsoft.com/office/powerpoint/2010/main" val="1602821618"/>
+        <p14:creationId xmlns:p14="http://schemas.microsoft.com/office/powerpoint/2010/main" val="3149914032"/>
       </p:ext>
     </p:extLst>
   </p:cSld>
@@ -6067,7 +8009,7 @@
                                         <p:tgtEl>
                                           <p:spTgt spid="2">
                                             <p:graphicEl>
-                                              <a:dgm id="{FFE21CBA-CCDD-4281-9C8A-E232B67A3A2F}"/>
+                                              <a:dgm id="{AAE580DE-C5E4-4045-9684-E3E9F2D01897}"/>
                                             </p:graphicEl>
                                           </p:spTgt>
                                         </p:tgtEl>
@@ -6085,7 +8027,7 @@
                                         <p:tgtEl>
                                           <p:spTgt spid="2">
                                             <p:graphicEl>
-                                              <a:dgm id="{FFE21CBA-CCDD-4281-9C8A-E232B67A3A2F}"/>
+                                              <a:dgm id="{AAE580DE-C5E4-4045-9684-E3E9F2D01897}"/>
                                             </p:graphicEl>
                                           </p:spTgt>
                                         </p:tgtEl>
@@ -6128,7 +8070,7 @@
                                         <p:tgtEl>
                                           <p:spTgt spid="2">
                                             <p:graphicEl>
-                                              <a:dgm id="{AC3437E1-3F1B-4B83-B80E-8914EB101AE2}"/>
+                                              <a:dgm id="{B3C8E17D-1927-4927-AE81-5C1968CAD583}"/>
                                             </p:graphicEl>
                                           </p:spTgt>
                                         </p:tgtEl>
@@ -6146,7 +8088,7 @@
                                         <p:tgtEl>
                                           <p:spTgt spid="2">
                                             <p:graphicEl>
-                                              <a:dgm id="{AC3437E1-3F1B-4B83-B80E-8914EB101AE2}"/>
+                                              <a:dgm id="{B3C8E17D-1927-4927-AE81-5C1968CAD583}"/>
                                             </p:graphicEl>
                                           </p:spTgt>
                                         </p:tgtEl>
@@ -6189,7 +8131,7 @@
                                         <p:tgtEl>
                                           <p:spTgt spid="2">
                                             <p:graphicEl>
-                                              <a:dgm id="{8654F531-9870-4D4A-AE3A-D40F2A145AD2}"/>
+                                              <a:dgm id="{58663AE0-1B97-4DB5-8A19-8C642E36D303}"/>
                                             </p:graphicEl>
                                           </p:spTgt>
                                         </p:tgtEl>
@@ -6207,7 +8149,7 @@
                                         <p:tgtEl>
                                           <p:spTgt spid="2">
                                             <p:graphicEl>
-                                              <a:dgm id="{8654F531-9870-4D4A-AE3A-D40F2A145AD2}"/>
+                                              <a:dgm id="{58663AE0-1B97-4DB5-8A19-8C642E36D303}"/>
                                             </p:graphicEl>
                                           </p:spTgt>
                                         </p:tgtEl>
@@ -6250,7 +8192,7 @@
                                         <p:tgtEl>
                                           <p:spTgt spid="2">
                                             <p:graphicEl>
-                                              <a:dgm id="{B940C21E-C49E-4650-9981-58BB44CE2F42}"/>
+                                              <a:dgm id="{AF1DF682-0665-4F0A-9D85-6BE8F2987DE7}"/>
                                             </p:graphicEl>
                                           </p:spTgt>
                                         </p:tgtEl>
@@ -6268,7 +8210,7 @@
                                         <p:tgtEl>
                                           <p:spTgt spid="2">
                                             <p:graphicEl>
-                                              <a:dgm id="{B940C21E-C49E-4650-9981-58BB44CE2F42}"/>
+                                              <a:dgm id="{AF1DF682-0665-4F0A-9D85-6BE8F2987DE7}"/>
                                             </p:graphicEl>
                                           </p:spTgt>
                                         </p:tgtEl>
@@ -6311,7 +8253,7 @@
                                         <p:tgtEl>
                                           <p:spTgt spid="2">
                                             <p:graphicEl>
-                                              <a:dgm id="{59ABCD57-F696-4E4E-AFA1-F4E16B6ED0D7}"/>
+                                              <a:dgm id="{239D47AE-0ED6-4909-A1F2-8C9100A0363A}"/>
                                             </p:graphicEl>
                                           </p:spTgt>
                                         </p:tgtEl>
@@ -6329,7 +8271,7 @@
                                         <p:tgtEl>
                                           <p:spTgt spid="2">
                                             <p:graphicEl>
-                                              <a:dgm id="{59ABCD57-F696-4E4E-AFA1-F4E16B6ED0D7}"/>
+                                              <a:dgm id="{239D47AE-0ED6-4909-A1F2-8C9100A0363A}"/>
                                             </p:graphicEl>
                                           </p:spTgt>
                                         </p:tgtEl>
@@ -6369,6 +8311,745 @@
       <p:bldGraphic spid="2" grpId="0">
         <p:bldSub>
           <a:bldDgm bld="one"/>
+        </p:bldSub>
+      </p:bldGraphic>
+    </p:bldLst>
+  </p:timing>
+</p:sld>
+</file>
+
+<file path=ppt/slides/slide2.xml><?xml version="1.0" encoding="utf-8"?>
+<p:sld xmlns:a="http://schemas.openxmlformats.org/drawingml/2006/main" xmlns:r="http://schemas.openxmlformats.org/officeDocument/2006/relationships" xmlns:p="http://schemas.openxmlformats.org/presentationml/2006/main">
+  <p:cSld>
+    <p:spTree>
+      <p:nvGrpSpPr>
+        <p:cNvPr id="1" name=""/>
+        <p:cNvGrpSpPr/>
+        <p:nvPr/>
+      </p:nvGrpSpPr>
+      <p:grpSpPr>
+        <a:xfrm>
+          <a:off x="0" y="0"/>
+          <a:ext cx="0" cy="0"/>
+          <a:chOff x="0" y="0"/>
+          <a:chExt cx="0" cy="0"/>
+        </a:xfrm>
+      </p:grpSpPr>
+      <p:graphicFrame>
+        <p:nvGraphicFramePr>
+          <p:cNvPr id="2" name="图表 1">
+            <a:extLst>
+              <a:ext uri="{FF2B5EF4-FFF2-40B4-BE49-F238E27FC236}">
+                <a16:creationId xmlns:a16="http://schemas.microsoft.com/office/drawing/2014/main" id="{6EE3928A-07D8-A28A-C4E1-51E7A7DFFF19}"/>
+              </a:ext>
+            </a:extLst>
+          </p:cNvPr>
+          <p:cNvGraphicFramePr/>
+          <p:nvPr>
+            <p:extLst>
+              <p:ext uri="{D42A27DB-BD31-4B8C-83A1-F6EECF244321}">
+                <p14:modId xmlns:p14="http://schemas.microsoft.com/office/powerpoint/2010/main" val="2043437533"/>
+              </p:ext>
+            </p:extLst>
+          </p:nvPr>
+        </p:nvGraphicFramePr>
+        <p:xfrm>
+          <a:off x="1016000" y="508000"/>
+          <a:ext cx="10160000" cy="5842000"/>
+        </p:xfrm>
+        <a:graphic>
+          <a:graphicData uri="http://schemas.openxmlformats.org/drawingml/2006/chart">
+            <c:chart xmlns:c="http://schemas.openxmlformats.org/drawingml/2006/chart" xmlns:r="http://schemas.openxmlformats.org/officeDocument/2006/relationships" r:id="rId2"/>
+          </a:graphicData>
+        </a:graphic>
+      </p:graphicFrame>
+    </p:spTree>
+    <p:extLst>
+      <p:ext uri="{BB962C8B-B14F-4D97-AF65-F5344CB8AC3E}">
+        <p14:creationId xmlns:p14="http://schemas.microsoft.com/office/powerpoint/2010/main" val="3130252661"/>
+      </p:ext>
+    </p:extLst>
+  </p:cSld>
+  <p:clrMapOvr>
+    <a:masterClrMapping/>
+  </p:clrMapOvr>
+  <p:timing>
+    <p:tnLst>
+      <p:par>
+        <p:cTn id="1" dur="indefinite" restart="never" nodeType="tmRoot">
+          <p:childTnLst>
+            <p:seq concurrent="1" nextAc="seek">
+              <p:cTn id="2" dur="indefinite" nodeType="mainSeq">
+                <p:childTnLst>
+                  <p:par>
+                    <p:cTn id="4" fill="hold">
+                      <p:stCondLst>
+                        <p:cond delay="indefinite"/>
+                      </p:stCondLst>
+                      <p:childTnLst>
+                        <p:par>
+                          <p:cTn id="5" fill="hold">
+                            <p:stCondLst>
+                              <p:cond delay="0"/>
+                            </p:stCondLst>
+                            <p:childTnLst>
+                              <p:par>
+                                <p:cTn id="6" presetID="22" presetClass="entr" presetSubtype="4" fill="hold" grpId="0" nodeType="clickEffect">
+                                  <p:stCondLst>
+                                    <p:cond delay="0"/>
+                                  </p:stCondLst>
+                                  <p:childTnLst>
+                                    <p:set>
+                                      <p:cBhvr>
+                                        <p:cTn id="7" dur="1" fill="hold">
+                                          <p:stCondLst>
+                                            <p:cond delay="0"/>
+                                          </p:stCondLst>
+                                        </p:cTn>
+                                        <p:tgtEl>
+                                          <p:spTgt spid="2">
+                                            <p:graphicEl>
+                                              <a:chart seriesIdx="-3" categoryIdx="-3" bldStep="gridLegend"/>
+                                            </p:graphicEl>
+                                          </p:spTgt>
+                                        </p:tgtEl>
+                                        <p:attrNameLst>
+                                          <p:attrName>style.visibility</p:attrName>
+                                        </p:attrNameLst>
+                                      </p:cBhvr>
+                                      <p:to>
+                                        <p:strVal val="visible"/>
+                                      </p:to>
+                                    </p:set>
+                                    <p:animEffect transition="in" filter="wipe(down)">
+                                      <p:cBhvr>
+                                        <p:cTn id="8" dur="500"/>
+                                        <p:tgtEl>
+                                          <p:spTgt spid="2">
+                                            <p:graphicEl>
+                                              <a:chart seriesIdx="-3" categoryIdx="-3" bldStep="gridLegend"/>
+                                            </p:graphicEl>
+                                          </p:spTgt>
+                                        </p:tgtEl>
+                                      </p:cBhvr>
+                                    </p:animEffect>
+                                  </p:childTnLst>
+                                </p:cTn>
+                              </p:par>
+                            </p:childTnLst>
+                          </p:cTn>
+                        </p:par>
+                      </p:childTnLst>
+                    </p:cTn>
+                  </p:par>
+                  <p:par>
+                    <p:cTn id="9" fill="hold">
+                      <p:stCondLst>
+                        <p:cond delay="indefinite"/>
+                      </p:stCondLst>
+                      <p:childTnLst>
+                        <p:par>
+                          <p:cTn id="10" fill="hold">
+                            <p:stCondLst>
+                              <p:cond delay="0"/>
+                            </p:stCondLst>
+                            <p:childTnLst>
+                              <p:par>
+                                <p:cTn id="11" presetID="22" presetClass="entr" presetSubtype="4" fill="hold" grpId="0" nodeType="clickEffect">
+                                  <p:stCondLst>
+                                    <p:cond delay="0"/>
+                                  </p:stCondLst>
+                                  <p:childTnLst>
+                                    <p:set>
+                                      <p:cBhvr>
+                                        <p:cTn id="12" dur="1" fill="hold">
+                                          <p:stCondLst>
+                                            <p:cond delay="0"/>
+                                          </p:stCondLst>
+                                        </p:cTn>
+                                        <p:tgtEl>
+                                          <p:spTgt spid="2">
+                                            <p:graphicEl>
+                                              <a:chart seriesIdx="0" categoryIdx="-4" bldStep="series"/>
+                                            </p:graphicEl>
+                                          </p:spTgt>
+                                        </p:tgtEl>
+                                        <p:attrNameLst>
+                                          <p:attrName>style.visibility</p:attrName>
+                                        </p:attrNameLst>
+                                      </p:cBhvr>
+                                      <p:to>
+                                        <p:strVal val="visible"/>
+                                      </p:to>
+                                    </p:set>
+                                    <p:animEffect transition="in" filter="wipe(down)">
+                                      <p:cBhvr>
+                                        <p:cTn id="13" dur="500"/>
+                                        <p:tgtEl>
+                                          <p:spTgt spid="2">
+                                            <p:graphicEl>
+                                              <a:chart seriesIdx="0" categoryIdx="-4" bldStep="series"/>
+                                            </p:graphicEl>
+                                          </p:spTgt>
+                                        </p:tgtEl>
+                                      </p:cBhvr>
+                                    </p:animEffect>
+                                  </p:childTnLst>
+                                </p:cTn>
+                              </p:par>
+                            </p:childTnLst>
+                          </p:cTn>
+                        </p:par>
+                      </p:childTnLst>
+                    </p:cTn>
+                  </p:par>
+                  <p:par>
+                    <p:cTn id="14" fill="hold">
+                      <p:stCondLst>
+                        <p:cond delay="indefinite"/>
+                      </p:stCondLst>
+                      <p:childTnLst>
+                        <p:par>
+                          <p:cTn id="15" fill="hold">
+                            <p:stCondLst>
+                              <p:cond delay="0"/>
+                            </p:stCondLst>
+                            <p:childTnLst>
+                              <p:par>
+                                <p:cTn id="16" presetID="22" presetClass="entr" presetSubtype="4" fill="hold" grpId="0" nodeType="clickEffect">
+                                  <p:stCondLst>
+                                    <p:cond delay="0"/>
+                                  </p:stCondLst>
+                                  <p:childTnLst>
+                                    <p:set>
+                                      <p:cBhvr>
+                                        <p:cTn id="17" dur="1" fill="hold">
+                                          <p:stCondLst>
+                                            <p:cond delay="0"/>
+                                          </p:stCondLst>
+                                        </p:cTn>
+                                        <p:tgtEl>
+                                          <p:spTgt spid="2">
+                                            <p:graphicEl>
+                                              <a:chart seriesIdx="1" categoryIdx="-4" bldStep="series"/>
+                                            </p:graphicEl>
+                                          </p:spTgt>
+                                        </p:tgtEl>
+                                        <p:attrNameLst>
+                                          <p:attrName>style.visibility</p:attrName>
+                                        </p:attrNameLst>
+                                      </p:cBhvr>
+                                      <p:to>
+                                        <p:strVal val="visible"/>
+                                      </p:to>
+                                    </p:set>
+                                    <p:animEffect transition="in" filter="wipe(down)">
+                                      <p:cBhvr>
+                                        <p:cTn id="18" dur="500"/>
+                                        <p:tgtEl>
+                                          <p:spTgt spid="2">
+                                            <p:graphicEl>
+                                              <a:chart seriesIdx="1" categoryIdx="-4" bldStep="series"/>
+                                            </p:graphicEl>
+                                          </p:spTgt>
+                                        </p:tgtEl>
+                                      </p:cBhvr>
+                                    </p:animEffect>
+                                  </p:childTnLst>
+                                </p:cTn>
+                              </p:par>
+                            </p:childTnLst>
+                          </p:cTn>
+                        </p:par>
+                      </p:childTnLst>
+                    </p:cTn>
+                  </p:par>
+                  <p:par>
+                    <p:cTn id="19" fill="hold">
+                      <p:stCondLst>
+                        <p:cond delay="indefinite"/>
+                      </p:stCondLst>
+                      <p:childTnLst>
+                        <p:par>
+                          <p:cTn id="20" fill="hold">
+                            <p:stCondLst>
+                              <p:cond delay="0"/>
+                            </p:stCondLst>
+                            <p:childTnLst>
+                              <p:par>
+                                <p:cTn id="21" presetID="22" presetClass="entr" presetSubtype="4" fill="hold" grpId="0" nodeType="clickEffect">
+                                  <p:stCondLst>
+                                    <p:cond delay="0"/>
+                                  </p:stCondLst>
+                                  <p:childTnLst>
+                                    <p:set>
+                                      <p:cBhvr>
+                                        <p:cTn id="22" dur="1" fill="hold">
+                                          <p:stCondLst>
+                                            <p:cond delay="0"/>
+                                          </p:stCondLst>
+                                        </p:cTn>
+                                        <p:tgtEl>
+                                          <p:spTgt spid="2">
+                                            <p:graphicEl>
+                                              <a:chart seriesIdx="2" categoryIdx="-4" bldStep="series"/>
+                                            </p:graphicEl>
+                                          </p:spTgt>
+                                        </p:tgtEl>
+                                        <p:attrNameLst>
+                                          <p:attrName>style.visibility</p:attrName>
+                                        </p:attrNameLst>
+                                      </p:cBhvr>
+                                      <p:to>
+                                        <p:strVal val="visible"/>
+                                      </p:to>
+                                    </p:set>
+                                    <p:animEffect transition="in" filter="wipe(down)">
+                                      <p:cBhvr>
+                                        <p:cTn id="23" dur="500"/>
+                                        <p:tgtEl>
+                                          <p:spTgt spid="2">
+                                            <p:graphicEl>
+                                              <a:chart seriesIdx="2" categoryIdx="-4" bldStep="series"/>
+                                            </p:graphicEl>
+                                          </p:spTgt>
+                                        </p:tgtEl>
+                                      </p:cBhvr>
+                                    </p:animEffect>
+                                  </p:childTnLst>
+                                </p:cTn>
+                              </p:par>
+                            </p:childTnLst>
+                          </p:cTn>
+                        </p:par>
+                      </p:childTnLst>
+                    </p:cTn>
+                  </p:par>
+                </p:childTnLst>
+              </p:cTn>
+              <p:prevCondLst>
+                <p:cond evt="onPrev" delay="0">
+                  <p:tgtEl>
+                    <p:sldTgt/>
+                  </p:tgtEl>
+                </p:cond>
+              </p:prevCondLst>
+              <p:nextCondLst>
+                <p:cond evt="onNext" delay="0">
+                  <p:tgtEl>
+                    <p:sldTgt/>
+                  </p:tgtEl>
+                </p:cond>
+              </p:nextCondLst>
+            </p:seq>
+          </p:childTnLst>
+        </p:cTn>
+      </p:par>
+    </p:tnLst>
+    <p:bldLst>
+      <p:bldGraphic spid="2" grpId="0">
+        <p:bldSub>
+          <a:bldChart bld="series"/>
+        </p:bldSub>
+      </p:bldGraphic>
+    </p:bldLst>
+  </p:timing>
+</p:sld>
+</file>
+
+<file path=ppt/slides/slide3.xml><?xml version="1.0" encoding="utf-8"?>
+<p:sld xmlns:a="http://schemas.openxmlformats.org/drawingml/2006/main" xmlns:r="http://schemas.openxmlformats.org/officeDocument/2006/relationships" xmlns:p="http://schemas.openxmlformats.org/presentationml/2006/main">
+  <p:cSld>
+    <p:spTree>
+      <p:nvGrpSpPr>
+        <p:cNvPr id="1" name=""/>
+        <p:cNvGrpSpPr/>
+        <p:nvPr/>
+      </p:nvGrpSpPr>
+      <p:grpSpPr>
+        <a:xfrm>
+          <a:off x="0" y="0"/>
+          <a:ext cx="0" cy="0"/>
+          <a:chOff x="0" y="0"/>
+          <a:chExt cx="0" cy="0"/>
+        </a:xfrm>
+      </p:grpSpPr>
+      <p:graphicFrame>
+        <p:nvGraphicFramePr>
+          <p:cNvPr id="2" name="图表 1">
+            <a:extLst>
+              <a:ext uri="{FF2B5EF4-FFF2-40B4-BE49-F238E27FC236}">
+                <a16:creationId xmlns:a16="http://schemas.microsoft.com/office/drawing/2014/main" id="{003C8901-5DBE-089D-4B6C-4A4016645F55}"/>
+              </a:ext>
+            </a:extLst>
+          </p:cNvPr>
+          <p:cNvGraphicFramePr/>
+          <p:nvPr>
+            <p:extLst>
+              <p:ext uri="{D42A27DB-BD31-4B8C-83A1-F6EECF244321}">
+                <p14:modId xmlns:p14="http://schemas.microsoft.com/office/powerpoint/2010/main" val="2767655755"/>
+              </p:ext>
+            </p:extLst>
+          </p:nvPr>
+        </p:nvGraphicFramePr>
+        <p:xfrm>
+          <a:off x="1016000" y="508000"/>
+          <a:ext cx="10160000" cy="5842000"/>
+        </p:xfrm>
+        <a:graphic>
+          <a:graphicData uri="http://schemas.openxmlformats.org/drawingml/2006/chart">
+            <c:chart xmlns:c="http://schemas.openxmlformats.org/drawingml/2006/chart" xmlns:r="http://schemas.openxmlformats.org/officeDocument/2006/relationships" r:id="rId2"/>
+          </a:graphicData>
+        </a:graphic>
+      </p:graphicFrame>
+    </p:spTree>
+    <p:extLst>
+      <p:ext uri="{BB962C8B-B14F-4D97-AF65-F5344CB8AC3E}">
+        <p14:creationId xmlns:p14="http://schemas.microsoft.com/office/powerpoint/2010/main" val="2515899639"/>
+      </p:ext>
+    </p:extLst>
+  </p:cSld>
+  <p:clrMapOvr>
+    <a:masterClrMapping/>
+  </p:clrMapOvr>
+  <p:timing>
+    <p:tnLst>
+      <p:par>
+        <p:cTn id="1" dur="indefinite" restart="never" nodeType="tmRoot">
+          <p:childTnLst>
+            <p:seq concurrent="1" nextAc="seek">
+              <p:cTn id="2" dur="indefinite" nodeType="mainSeq">
+                <p:childTnLst>
+                  <p:par>
+                    <p:cTn id="4" fill="hold">
+                      <p:stCondLst>
+                        <p:cond delay="indefinite"/>
+                      </p:stCondLst>
+                      <p:childTnLst>
+                        <p:par>
+                          <p:cTn id="5" fill="hold">
+                            <p:stCondLst>
+                              <p:cond delay="0"/>
+                            </p:stCondLst>
+                            <p:childTnLst>
+                              <p:par>
+                                <p:cTn id="6" presetID="22" presetClass="entr" presetSubtype="4" fill="hold" grpId="0" nodeType="clickEffect">
+                                  <p:stCondLst>
+                                    <p:cond delay="0"/>
+                                  </p:stCondLst>
+                                  <p:childTnLst>
+                                    <p:set>
+                                      <p:cBhvr>
+                                        <p:cTn id="7" dur="1" fill="hold">
+                                          <p:stCondLst>
+                                            <p:cond delay="0"/>
+                                          </p:stCondLst>
+                                        </p:cTn>
+                                        <p:tgtEl>
+                                          <p:spTgt spid="2">
+                                            <p:graphicEl>
+                                              <a:chart seriesIdx="-3" categoryIdx="-3" bldStep="gridLegend"/>
+                                            </p:graphicEl>
+                                          </p:spTgt>
+                                        </p:tgtEl>
+                                        <p:attrNameLst>
+                                          <p:attrName>style.visibility</p:attrName>
+                                        </p:attrNameLst>
+                                      </p:cBhvr>
+                                      <p:to>
+                                        <p:strVal val="visible"/>
+                                      </p:to>
+                                    </p:set>
+                                    <p:animEffect transition="in" filter="wipe(down)">
+                                      <p:cBhvr>
+                                        <p:cTn id="8" dur="500"/>
+                                        <p:tgtEl>
+                                          <p:spTgt spid="2">
+                                            <p:graphicEl>
+                                              <a:chart seriesIdx="-3" categoryIdx="-3" bldStep="gridLegend"/>
+                                            </p:graphicEl>
+                                          </p:spTgt>
+                                        </p:tgtEl>
+                                      </p:cBhvr>
+                                    </p:animEffect>
+                                  </p:childTnLst>
+                                </p:cTn>
+                              </p:par>
+                            </p:childTnLst>
+                          </p:cTn>
+                        </p:par>
+                      </p:childTnLst>
+                    </p:cTn>
+                  </p:par>
+                  <p:par>
+                    <p:cTn id="9" fill="hold">
+                      <p:stCondLst>
+                        <p:cond delay="indefinite"/>
+                      </p:stCondLst>
+                      <p:childTnLst>
+                        <p:par>
+                          <p:cTn id="10" fill="hold">
+                            <p:stCondLst>
+                              <p:cond delay="0"/>
+                            </p:stCondLst>
+                            <p:childTnLst>
+                              <p:par>
+                                <p:cTn id="11" presetID="22" presetClass="entr" presetSubtype="4" fill="hold" grpId="0" nodeType="clickEffect">
+                                  <p:stCondLst>
+                                    <p:cond delay="0"/>
+                                  </p:stCondLst>
+                                  <p:childTnLst>
+                                    <p:set>
+                                      <p:cBhvr>
+                                        <p:cTn id="12" dur="1" fill="hold">
+                                          <p:stCondLst>
+                                            <p:cond delay="0"/>
+                                          </p:stCondLst>
+                                        </p:cTn>
+                                        <p:tgtEl>
+                                          <p:spTgt spid="2">
+                                            <p:graphicEl>
+                                              <a:chart seriesIdx="-4" categoryIdx="0" bldStep="category"/>
+                                            </p:graphicEl>
+                                          </p:spTgt>
+                                        </p:tgtEl>
+                                        <p:attrNameLst>
+                                          <p:attrName>style.visibility</p:attrName>
+                                        </p:attrNameLst>
+                                      </p:cBhvr>
+                                      <p:to>
+                                        <p:strVal val="visible"/>
+                                      </p:to>
+                                    </p:set>
+                                    <p:animEffect transition="in" filter="wipe(down)">
+                                      <p:cBhvr>
+                                        <p:cTn id="13" dur="500"/>
+                                        <p:tgtEl>
+                                          <p:spTgt spid="2">
+                                            <p:graphicEl>
+                                              <a:chart seriesIdx="-4" categoryIdx="0" bldStep="category"/>
+                                            </p:graphicEl>
+                                          </p:spTgt>
+                                        </p:tgtEl>
+                                      </p:cBhvr>
+                                    </p:animEffect>
+                                  </p:childTnLst>
+                                </p:cTn>
+                              </p:par>
+                            </p:childTnLst>
+                          </p:cTn>
+                        </p:par>
+                      </p:childTnLst>
+                    </p:cTn>
+                  </p:par>
+                  <p:par>
+                    <p:cTn id="14" fill="hold">
+                      <p:stCondLst>
+                        <p:cond delay="indefinite"/>
+                      </p:stCondLst>
+                      <p:childTnLst>
+                        <p:par>
+                          <p:cTn id="15" fill="hold">
+                            <p:stCondLst>
+                              <p:cond delay="0"/>
+                            </p:stCondLst>
+                            <p:childTnLst>
+                              <p:par>
+                                <p:cTn id="16" presetID="22" presetClass="entr" presetSubtype="4" fill="hold" grpId="0" nodeType="clickEffect">
+                                  <p:stCondLst>
+                                    <p:cond delay="0"/>
+                                  </p:stCondLst>
+                                  <p:childTnLst>
+                                    <p:set>
+                                      <p:cBhvr>
+                                        <p:cTn id="17" dur="1" fill="hold">
+                                          <p:stCondLst>
+                                            <p:cond delay="0"/>
+                                          </p:stCondLst>
+                                        </p:cTn>
+                                        <p:tgtEl>
+                                          <p:spTgt spid="2">
+                                            <p:graphicEl>
+                                              <a:chart seriesIdx="-4" categoryIdx="1" bldStep="category"/>
+                                            </p:graphicEl>
+                                          </p:spTgt>
+                                        </p:tgtEl>
+                                        <p:attrNameLst>
+                                          <p:attrName>style.visibility</p:attrName>
+                                        </p:attrNameLst>
+                                      </p:cBhvr>
+                                      <p:to>
+                                        <p:strVal val="visible"/>
+                                      </p:to>
+                                    </p:set>
+                                    <p:animEffect transition="in" filter="wipe(down)">
+                                      <p:cBhvr>
+                                        <p:cTn id="18" dur="500"/>
+                                        <p:tgtEl>
+                                          <p:spTgt spid="2">
+                                            <p:graphicEl>
+                                              <a:chart seriesIdx="-4" categoryIdx="1" bldStep="category"/>
+                                            </p:graphicEl>
+                                          </p:spTgt>
+                                        </p:tgtEl>
+                                      </p:cBhvr>
+                                    </p:animEffect>
+                                  </p:childTnLst>
+                                </p:cTn>
+                              </p:par>
+                            </p:childTnLst>
+                          </p:cTn>
+                        </p:par>
+                      </p:childTnLst>
+                    </p:cTn>
+                  </p:par>
+                  <p:par>
+                    <p:cTn id="19" fill="hold">
+                      <p:stCondLst>
+                        <p:cond delay="indefinite"/>
+                      </p:stCondLst>
+                      <p:childTnLst>
+                        <p:par>
+                          <p:cTn id="20" fill="hold">
+                            <p:stCondLst>
+                              <p:cond delay="0"/>
+                            </p:stCondLst>
+                            <p:childTnLst>
+                              <p:par>
+                                <p:cTn id="21" presetID="22" presetClass="entr" presetSubtype="4" fill="hold" grpId="0" nodeType="clickEffect">
+                                  <p:stCondLst>
+                                    <p:cond delay="0"/>
+                                  </p:stCondLst>
+                                  <p:childTnLst>
+                                    <p:set>
+                                      <p:cBhvr>
+                                        <p:cTn id="22" dur="1" fill="hold">
+                                          <p:stCondLst>
+                                            <p:cond delay="0"/>
+                                          </p:stCondLst>
+                                        </p:cTn>
+                                        <p:tgtEl>
+                                          <p:spTgt spid="2">
+                                            <p:graphicEl>
+                                              <a:chart seriesIdx="-4" categoryIdx="2" bldStep="category"/>
+                                            </p:graphicEl>
+                                          </p:spTgt>
+                                        </p:tgtEl>
+                                        <p:attrNameLst>
+                                          <p:attrName>style.visibility</p:attrName>
+                                        </p:attrNameLst>
+                                      </p:cBhvr>
+                                      <p:to>
+                                        <p:strVal val="visible"/>
+                                      </p:to>
+                                    </p:set>
+                                    <p:animEffect transition="in" filter="wipe(down)">
+                                      <p:cBhvr>
+                                        <p:cTn id="23" dur="500"/>
+                                        <p:tgtEl>
+                                          <p:spTgt spid="2">
+                                            <p:graphicEl>
+                                              <a:chart seriesIdx="-4" categoryIdx="2" bldStep="category"/>
+                                            </p:graphicEl>
+                                          </p:spTgt>
+                                        </p:tgtEl>
+                                      </p:cBhvr>
+                                    </p:animEffect>
+                                  </p:childTnLst>
+                                </p:cTn>
+                              </p:par>
+                            </p:childTnLst>
+                          </p:cTn>
+                        </p:par>
+                      </p:childTnLst>
+                    </p:cTn>
+                  </p:par>
+                  <p:par>
+                    <p:cTn id="24" fill="hold">
+                      <p:stCondLst>
+                        <p:cond delay="indefinite"/>
+                      </p:stCondLst>
+                      <p:childTnLst>
+                        <p:par>
+                          <p:cTn id="25" fill="hold">
+                            <p:stCondLst>
+                              <p:cond delay="0"/>
+                            </p:stCondLst>
+                            <p:childTnLst>
+                              <p:par>
+                                <p:cTn id="26" presetID="22" presetClass="entr" presetSubtype="4" fill="hold" grpId="0" nodeType="clickEffect">
+                                  <p:stCondLst>
+                                    <p:cond delay="0"/>
+                                  </p:stCondLst>
+                                  <p:childTnLst>
+                                    <p:set>
+                                      <p:cBhvr>
+                                        <p:cTn id="27" dur="1" fill="hold">
+                                          <p:stCondLst>
+                                            <p:cond delay="0"/>
+                                          </p:stCondLst>
+                                        </p:cTn>
+                                        <p:tgtEl>
+                                          <p:spTgt spid="2">
+                                            <p:graphicEl>
+                                              <a:chart seriesIdx="-4" categoryIdx="3" bldStep="category"/>
+                                            </p:graphicEl>
+                                          </p:spTgt>
+                                        </p:tgtEl>
+                                        <p:attrNameLst>
+                                          <p:attrName>style.visibility</p:attrName>
+                                        </p:attrNameLst>
+                                      </p:cBhvr>
+                                      <p:to>
+                                        <p:strVal val="visible"/>
+                                      </p:to>
+                                    </p:set>
+                                    <p:animEffect transition="in" filter="wipe(down)">
+                                      <p:cBhvr>
+                                        <p:cTn id="28" dur="500"/>
+                                        <p:tgtEl>
+                                          <p:spTgt spid="2">
+                                            <p:graphicEl>
+                                              <a:chart seriesIdx="-4" categoryIdx="3" bldStep="category"/>
+                                            </p:graphicEl>
+                                          </p:spTgt>
+                                        </p:tgtEl>
+                                      </p:cBhvr>
+                                    </p:animEffect>
+                                  </p:childTnLst>
+                                </p:cTn>
+                              </p:par>
+                            </p:childTnLst>
+                          </p:cTn>
+                        </p:par>
+                      </p:childTnLst>
+                    </p:cTn>
+                  </p:par>
+                </p:childTnLst>
+              </p:cTn>
+              <p:prevCondLst>
+                <p:cond evt="onPrev" delay="0">
+                  <p:tgtEl>
+                    <p:sldTgt/>
+                  </p:tgtEl>
+                </p:cond>
+              </p:prevCondLst>
+              <p:nextCondLst>
+                <p:cond evt="onNext" delay="0">
+                  <p:tgtEl>
+                    <p:sldTgt/>
+                  </p:tgtEl>
+                </p:cond>
+              </p:nextCondLst>
+            </p:seq>
+          </p:childTnLst>
+        </p:cTn>
+      </p:par>
+    </p:tnLst>
+    <p:bldLst>
+      <p:bldGraphic spid="2" grpId="0">
+        <p:bldSub>
+          <a:bldChart bld="category"/>
         </p:bldSub>
       </p:bldGraphic>
     </p:bldLst>
